--- a/it/slides/14-Architettura_dei_Calcolatori-Registri_e_Bus-Codice.pptx
+++ b/it/slides/14-Architettura_dei_Calcolatori-Registri_e_Bus-Codice.pptx
@@ -123,20 +123,24 @@
   <p:extLst>
     <p:ext uri="{521415D9-36F7-43E2-AB2F-B90AF26B5E84}">
       <p14:sectionLst xmlns:p14="http://schemas.microsoft.com/office/powerpoint/2010/main">
-        <p14:section name="Apertura" id="{d5bf5f5c-2484-2d94-8367-bde8a9aa95dc}">
+        <p14:section name="Apertura" id="{270b413f-3713-b396-5092-1cf17737dc4e}">
           <p14:sldIdLst>
             <p14:sldId id="256"/>
             <p14:sldId id="257"/>
           </p14:sldIdLst>
         </p14:section>
-        <p14:section name="I listati" id="{9de67af4-0fb9-e427-d5d1-8dcd22df2231}">
+        <p14:section name="Riscaldamento sulla macchina" id="{89e397b2-0125-8d57-cfbb-93a86058e63c}">
           <p14:sldIdLst>
             <p14:sldId id="258"/>
+          </p14:sldIdLst>
+        </p14:section>
+        <p14:section name="Ritorno alla macchina" id="{dbc07353-9956-69c2-e68d-49b15f6e6fc7}">
+          <p14:sldIdLst>
             <p14:sldId id="259"/>
             <p14:sldId id="260"/>
           </p14:sldIdLst>
         </p14:section>
-        <p14:section name="Il programma completo" id="{0df30748-fba2-8651-b671-2685ac360fbb}">
+        <p14:section name="Il programma completo" id="{b6f140be-a6ae-9c9f-288f-ed366f46acd3}">
           <p14:sldIdLst>
             <p14:sldId id="261"/>
             <p14:sldId id="262"/>
@@ -146,7 +150,7 @@
             <p14:sldId id="266"/>
           </p14:sldIdLst>
         </p14:section>
-        <p14:section name="Eseguire e provare" id="{2e3e1b54-1a0d-283f-f923-14ebc5229621}">
+        <p14:section name="Eseguire e provare" id="{5835a8dc-7317-4b15-1d72-178d7afa9ea3}">
           <p14:sldIdLst>
             <p14:sldId id="267"/>
             <p14:sldId id="268"/>
@@ -155,7 +159,7 @@
             <p14:sldId id="271"/>
           </p14:sldIdLst>
         </p14:section>
-        <p14:section name="Esercizi" id="{1aee2bf4-a79e-5a57-0632-5d8d86a084d9}">
+        <p14:section name="Esercizi" id="{c0db28a3-e3ad-7c61-eedc-43461819b71f}">
           <p14:sldIdLst>
             <p14:sldId id="272"/>
           </p14:sldIdLst>
@@ -1543,7 +1547,7 @@
             <a:r>
               <a:rPr lang="en-US" dirty="0"/>
               <a:t>I bus del kit. Dentro il chip il bus è parallelo. Il display è collegato con SPI, un bus seriale con un clock, una linea dati, un chip select e una linea che distingue i dati dai comandi: ogni pixel di ogni frame vi viaggia bit per bit. L'amplificatore è collegato con I2S, un altro bus seriale, che porta 22.050 campioni audio al secondo. I pulsanti usano un filo ciascuno: una rappresentazione decodificata. USB, anch'esso seriale, porta il firmware e la console di debug.
-Per il docente: Dalla descrizione hardware del repository di PRG32 (docs/hardware). Chip select è il CS della piccola memoria della slide precedente: più dispositivi possono condividere lo stesso bus seriale perché ascolta solo quello selezionato.</a:t>
+Per il docente: Dalla descrizione hardware del repository di PRG32 (docs/hardware). Chip select è il CS della piccola memoria della presentazione della lezione: più dispositivi possono condividere lo stesso bus seriale perché ascolta solo quello selezionato.</a:t>
             </a:r>
             <a:endParaRPr lang="en-US" dirty="0"/>
           </a:p>
@@ -2962,7 +2966,63 @@
       </p:sp>
       <p:sp>
         <p:nvSpPr>
-          <p:cNvPr id="11" name="Shape 9"/>
+          <p:cNvPr id="11" name="Text 9"/>
+          <p:cNvSpPr txBox="1"/>
+          <p:nvPr/>
+        </p:nvSpPr>
+        <p:spPr>
+          <a:xfrm>
+            <a:off x="4693615" y="566928"/>
+            <a:ext cx="6949440" cy="640080"/>
+          </a:xfrm>
+          <a:prstGeom prst="rect">
+            <a:avLst/>
+          </a:prstGeom>
+          <a:noFill/>
+          <a:ln/>
+        </p:spPr>
+        <p:txBody>
+          <a:bodyPr wrap="square" lIns="0" tIns="0" rIns="0" bIns="0" rtlCol="0" anchor="t"/>
+          <a:lstStyle/>
+          <a:p>
+            <a:pPr algn="r" indent="0" marL="0">
+              <a:buNone/>
+            </a:pPr>
+            <a:r>
+              <a:rPr lang="en-US" sz="1300" dirty="0">
+                <a:solidFill>
+                  <a:srgbClr val="CFE3EA"/>
+                </a:solidFill>
+                <a:latin typeface="Calibri" pitchFamily="34" charset="0"/>
+                <a:ea typeface="Calibri" pitchFamily="34" charset="-122"/>
+                <a:cs typeface="Calibri" pitchFamily="34" charset="-120"/>
+              </a:rPr>
+              <a:t>Presentazione del codice. I concetti, le figure e le domande sono nella presentazione della lezione:</a:t>
+            </a:r>
+            <a:endParaRPr lang="en-US" sz="1300" dirty="0"/>
+          </a:p>
+          <a:p>
+            <a:pPr algn="r" indent="0" marL="0">
+              <a:buNone/>
+            </a:pPr>
+            <a:r>
+              <a:rPr lang="en-US" sz="1300" dirty="0">
+                <a:solidFill>
+                  <a:srgbClr val="CFE3EA"/>
+                </a:solidFill>
+                <a:latin typeface="Calibri" pitchFamily="34" charset="0"/>
+                <a:ea typeface="Calibri" pitchFamily="34" charset="-122"/>
+                <a:cs typeface="Calibri" pitchFamily="34" charset="-120"/>
+              </a:rPr>
+              <a:t>14-Architettura_dei_Calcolatori-Registri_e_Bus.pptx</a:t>
+            </a:r>
+            <a:endParaRPr lang="en-US" sz="1300" dirty="0"/>
+          </a:p>
+        </p:txBody>
+      </p:sp>
+      <p:sp>
+        <p:nvSpPr>
+          <p:cNvPr id="12" name="Shape 10"/>
           <p:cNvSpPr/>
           <p:nvPr/>
         </p:nvSpPr>
@@ -2989,7 +3049,7 @@
       </p:sp>
       <p:pic>
         <p:nvPicPr>
-          <p:cNvPr id="12" name="Image 0" descr="/Users/raffaelemontella/devel/riscv-prg32/computer-architecture-with-prg32/tools/assets/menu_main.png">    </p:cNvPr>
+          <p:cNvPr id="13" name="Image 0" descr="/Users/raffaelemontella/devel/riscv-prg32/computer-architecture-with-prg32/tools/assets/menu_main.png">    </p:cNvPr>
           <p:cNvPicPr>
             <a:picLocks noChangeAspect="1"/>
           </p:cNvPicPr>

--- a/it/slides/14-Architettura_dei_Calcolatori-Registri_e_Bus-Codice.pptx
+++ b/it/slides/14-Architettura_dei_Calcolatori-Registri_e_Bus-Codice.pptx
@@ -123,24 +123,24 @@
   <p:extLst>
     <p:ext uri="{521415D9-36F7-43E2-AB2F-B90AF26B5E84}">
       <p14:sectionLst xmlns:p14="http://schemas.microsoft.com/office/powerpoint/2010/main">
-        <p14:section name="Apertura" id="{270b413f-3713-b396-5092-1cf17737dc4e}">
+        <p14:section name="Apertura" id="{2f5d9dbc-7d04-8203-8b26-e9e2c96c0dab}">
           <p14:sldIdLst>
             <p14:sldId id="256"/>
             <p14:sldId id="257"/>
           </p14:sldIdLst>
         </p14:section>
-        <p14:section name="Riscaldamento sulla macchina" id="{89e397b2-0125-8d57-cfbb-93a86058e63c}">
+        <p14:section name="Riscaldamento sulla macchina" id="{279ed533-95df-5e0e-f525-5e6c71c46e37}">
           <p14:sldIdLst>
             <p14:sldId id="258"/>
           </p14:sldIdLst>
         </p14:section>
-        <p14:section name="Ritorno alla macchina" id="{dbc07353-9956-69c2-e68d-49b15f6e6fc7}">
+        <p14:section name="Ritorno alla macchina" id="{5780f0d8-35b9-38c1-c497-a47d99229536}">
           <p14:sldIdLst>
             <p14:sldId id="259"/>
             <p14:sldId id="260"/>
           </p14:sldIdLst>
         </p14:section>
-        <p14:section name="Il programma completo" id="{b6f140be-a6ae-9c9f-288f-ed366f46acd3}">
+        <p14:section name="Il programma completo" id="{b0fac0f4-3342-6cc7-6168-0193a6a47c50}">
           <p14:sldIdLst>
             <p14:sldId id="261"/>
             <p14:sldId id="262"/>
@@ -150,7 +150,7 @@
             <p14:sldId id="266"/>
           </p14:sldIdLst>
         </p14:section>
-        <p14:section name="Eseguire e provare" id="{5835a8dc-7317-4b15-1d72-178d7afa9ea3}">
+        <p14:section name="Eseguire e provare" id="{618f2e55-92dd-d865-741a-7d795e10a0b5}">
           <p14:sldIdLst>
             <p14:sldId id="267"/>
             <p14:sldId id="268"/>
@@ -159,7 +159,7 @@
             <p14:sldId id="271"/>
           </p14:sldIdLst>
         </p14:section>
-        <p14:section name="Esercizi" id="{c0db28a3-e3ad-7c61-eedc-43461819b71f}">
+        <p14:section name="Esercizi" id="{c08577d1-ba73-68f2-818e-47ba2016af56}">
           <p14:sldIdLst>
             <p14:sldId id="272"/>
           </p14:sldIdLst>
@@ -568,7 +568,9 @@
           <a:p>
             <a:r>
               <a:rPr lang="en-US" dirty="0"/>
-              <a:t>Questa è la presentazione del codice della Lezione 14. La presentazione della lezione contiene i concetti; questa contiene tutto ciò che si scrive e si esegue: i listati con la loro spiegazione, il programma completo, che cosa mostra, e il modo di provarlo su ciascuno dei tre host.</a:t>
+              <a:t>Questa è la presentazione del codice della Lezione 14. La presentazione della lezione contiene i concetti; questa contiene tutto ciò che si scrive e si esegue: i listati con la loro spiegazione, il programma completo, che cosa mostra, e il modo di provarlo su ciascuno dei tre host.
+Stato di apprendimento: DA COMPRENDERE OGGI, alla fine di questa lezione lo spiegate, lo seguite passo passo e lo applicate da soli; DA UTILIZZARE OGGI, oggi seguite e usate la ricetta; come funziona dentro si spiega più avanti, o non fa parte del corso; DA COMPRENDERE PIÙ AVANTI, riconoscete il nome e lo scopo; lo spiega una lezione successiva. Una slide senza etichetta è contesto: una storia, un esempio, una domanda, un esercizio.
+Stato di apprendimento di questa lezione. DA COMPRENDERE OGGI: i registri a scorrimento; i registri come flip-flop; bus e porte three-state. DA UTILIZZARE OGGI: il programma completo, gli strumenti di PRG32 (si usa, non si studia, in questo corso). DA COMPRENDERE PIÙ AVANTI: l'I/O mappato in memoria (Lezione 15); memorie e indirizzi (Lezione 15). Una slide senza etichetta è contesto: una storia, un esempio, una domanda, un esercizio.</a:t>
             </a:r>
             <a:endParaRPr lang="en-US" dirty="0"/>
           </a:p>
@@ -657,6 +659,7 @@
             <a:r>
               <a:rPr lang="en-US" dirty="0"/>
               <a:t>Una pagina del programma completo, esattamente com'è nel repository. Leggetelo dall'inizio: l'intestazione dice che cosa mostra il programma e come compilarlo; seguono le tre funzioni init, update e draw, poi i dati. Le righe incontrate nei listati della lezione hanno qui gli stessi commenti.
+DA UTILIZZARE OGGI: il programma completo (si usa, non si studia, in questo corso).
 Per il docente: code/l14.S, come viene compilato ed eseguito dai test. I commenti fanno parte del programma, e sono in inglese come in tutti i listati: leggeteli con il codice.</a:t>
             </a:r>
             <a:endParaRPr lang="en-US" dirty="0"/>
@@ -746,6 +749,7 @@
             <a:r>
               <a:rPr lang="en-US" dirty="0"/>
               <a:t>Una pagina del programma completo, esattamente com'è nel repository. Leggetelo dall'inizio: l'intestazione dice che cosa mostra il programma e come compilarlo; seguono le tre funzioni init, update e draw, poi i dati. Le righe incontrate nei listati della lezione hanno qui gli stessi commenti.
+DA UTILIZZARE OGGI: il programma completo (si usa, non si studia, in questo corso).
 Per il docente: code/l14.S, come viene compilato ed eseguito dai test. I commenti fanno parte del programma, e sono in inglese come in tutti i listati: leggeteli con il codice.</a:t>
             </a:r>
             <a:endParaRPr lang="en-US" dirty="0"/>
@@ -924,6 +928,7 @@
             <a:r>
               <a:rPr lang="en-US" dirty="0"/>
               <a:t>La via più rapida: PRG32-QT sul vostro computer. Quattro passi, ciascuno con il suo comando. PRG32-QT si comporta come una scheda sulla porta 8080, ed è per questo che il comando di caricamento dice esp32c6. Con la modalità debug abilitata potete fermarvi su qualsiasi istruzione e leggere registri e memoria.
+DA UTILIZZARE OGGI: gli strumenti di PRG32 (si usa, non si studia, in questo corso).
 Per il docente: Eseguito dai test: la cartuccia di questa slide è compilata con questo comando ed eseguita sull'esecutore senza interfaccia di PRG32-QT. Senza la toolchain: importate il file .prg32 in PRG32-QT e scegliete Run Cartridge. Tasti: frecce o WASD per il joystick, Z o J per A, X o K per B, Invio per Start, Esc per tornare a Setup.</a:t>
             </a:r>
             <a:endParaRPr lang="en-US" dirty="0"/>
@@ -1013,6 +1018,7 @@
             <a:r>
               <a:rPr lang="en-US" dirty="0"/>
               <a:t>Lo stesso programma sull'emulatore. QEMU esegue il firmware vero su un chip emulato, quindi la cartuccia va compilata per l'architettura qemu. Caricate la cartuccia mentre QEMU è chiuso. Il firmware si apre sul menu Setup: scegliete Run Cartridge e lo slot. Ricordate che la tastiera è letta dal terminale, non dalla finestra con l'immagine.
+DA UTILIZZARE OGGI: gli strumenti di PRG32 (si usa, non si studia, in questo corso).
 Per il docente: Verificato dai test fino al caricamento: la cartuccia è compilata per l'architettura qemu e accettata nell'immagine flash dell'emulatore. Ciò che l'emulatore poi mostra non è verificato automaticamente: il QEMU di Espressif ha bisogno della sua finestra. Dall'ottobre 2026 il firmware parte da Setup: scegliete Run Cartridge, poi cart0.</a:t>
             </a:r>
             <a:endParaRPr lang="en-US" dirty="0"/>
@@ -1102,6 +1108,7 @@
             <a:r>
               <a:rPr lang="en-US" dirty="0"/>
               <a:t>Lo stesso programma sul kit. Il firmware si scrive una volta, via USB; dopo, le cartucce viaggiano sul Wi-Fi. Il comando di caricamento è quello usato per PRG32-QT con l'indirizzo della scheda. È l'unico host che i test automatici non eseguono: provatelo, e riferite ciò che vedete.
+DA UTILIZZARE OGGI: gli strumenti di PRG32 (si usa, non si studia, in questo corso).
 Per il docente: Non eseguito dai test: sulla macchina di prova non c'è una scheda. La cartuccia per l'architettura esp32c6 è compilata dai test; i passi sono quelli della documentazione di PRG32. Se la porta seriale non viene trovata, passatela esplicitamente. Per usare il Wi-Fi dell'aula: python3 -m prg32 wifi set --ssid NOME --password PASSWORD --mode sta.</a:t>
             </a:r>
             <a:endParaRPr lang="en-US" dirty="0"/>
@@ -1191,6 +1198,7 @@
             <a:r>
               <a:rPr lang="en-US" dirty="0"/>
               <a:t>I cinque sintomi più comuni, che cosa significa ciascuno, e che cosa fare. Leggete il messaggio prima di cambiare qualcosa: quasi sempre nomina la causa.
+DA UTILIZZARE OGGI: gli strumenti di PRG32 (si usa, non si studia, in questo corso).
 Per il docente: Le prime tre righe coprono la maggior parte dei casi. Quando chiedete aiuto, incollate il comando e l'intero messaggio come testo. docs/usage/troubleshooting.md del repository di PRG32 ha l'elenco completo.</a:t>
             </a:r>
             <a:endParaRPr lang="en-US" dirty="0"/>
@@ -1458,6 +1466,7 @@
             <a:r>
               <a:rPr lang="en-US" dirty="0"/>
               <a:t>Il ciclo invia un byte un bit alla volta, a partire dal più significativo. A ogni giro il byte viene scorso a destra di 7 e mascherato con 1, il che ne isola il bit più alto; quel bit verrebbe messo su una linea dati e si darebbe un impulso su una linea di clock; poi il byte viene scorso a sinistra di uno, così il bit successivo sale nella posizione più alta. Dopo otto giri tutto il byte è partito. Il ciclo è un registro a scorrimento in software. Il chip del kit contiene hardware che fa la stessa cosa, milioni di volte al secondo.
+DA COMPRENDERE OGGI: i registri a scorrimento. DA COMPRENDERE PIÙ AVANTI: l'I/O mappato in memoria (si studia nella Lezione 15).
 Per il docente: Scritto per questa lezione. Sul kit il display usa SPI e l'amplificatore I2S: entrambi sono bus seriali pilotati da registri a scorrimento interni al chip. Le due righe omesse scriverebbero in registri GPIO mappati in memoria (Lezione 15).</a:t>
             </a:r>
             <a:endParaRPr lang="en-US" dirty="0"/>
@@ -1547,6 +1556,7 @@
             <a:r>
               <a:rPr lang="en-US" dirty="0"/>
               <a:t>I bus del kit. Dentro il chip il bus è parallelo. Il display è collegato con SPI, un bus seriale con un clock, una linea dati, un chip select e una linea che distingue i dati dai comandi: ogni pixel di ogni frame vi viaggia bit per bit. L'amplificatore è collegato con I2S, un altro bus seriale, che porta 22.050 campioni audio al secondo. I pulsanti usano un filo ciascuno: una rappresentazione decodificata. USB, anch'esso seriale, porta il firmware e la console di debug.
+DA COMPRENDERE OGGI: bus e porte three-state.
 Per il docente: Dalla descrizione hardware del repository di PRG32 (docs/hardware). Chip select è il CS della piccola memoria della presentazione della lezione: più dispositivi possono condividere lo stesso bus seriale perché ascolta solo quello selezionato.</a:t>
             </a:r>
             <a:endParaRPr lang="en-US" dirty="0"/>
@@ -1636,6 +1646,7 @@
             <a:r>
               <a:rPr lang="en-US" dirty="0"/>
               <a:t>Le istruzioni di scorrimento spostano tutti i bit di un registro in un solo passo: slli e srli riempiono di zeri, srai con copie del bit di segno; sll, srl e sra prendono il numero di posizioni da un registro. In hardware non si tratta di una catena di flip-flop, che richiederebbe un impulso di clock per posizione, ma di un barrel shifter, una rete combinatoria fatta di strati di multiplexer, ed è una delle unità della ALU. Il codice a destra mostra le due conversioni tra parallelo e seriale.
+DA COMPRENDERE OGGI: i registri a scorrimento.
 Per il docente: A un vero registro a scorrimento servono n impulsi di clock per n posizioni; il barrel shifter della ALU è combinatorio e lo fa entro un periodo di clock.</a:t>
             </a:r>
             <a:endParaRPr lang="en-US" dirty="0"/>
@@ -1725,6 +1736,7 @@
             <a:r>
               <a:rPr lang="en-US" dirty="0"/>
               <a:t>Una pagina del programma completo, esattamente com'è nel repository. Leggetelo dall'inizio: l'intestazione dice che cosa mostra il programma e come compilarlo; seguono le tre funzioni init, update e draw, poi i dati. Le righe incontrate nei listati della lezione hanno qui gli stessi commenti.
+DA UTILIZZARE OGGI: il programma completo (si usa, non si studia, in questo corso).
 Per il docente: code/l14.S, come viene compilato ed eseguito dai test. I commenti fanno parte del programma, e sono in inglese come in tutti i listati: leggeteli con il codice.</a:t>
             </a:r>
             <a:endParaRPr lang="en-US" dirty="0"/>
@@ -1814,6 +1826,7 @@
             <a:r>
               <a:rPr lang="en-US" dirty="0"/>
               <a:t>Una pagina del programma completo, esattamente com'è nel repository. Leggetelo dall'inizio: l'intestazione dice che cosa mostra il programma e come compilarlo; seguono le tre funzioni init, update e draw, poi i dati. Le righe incontrate nei listati della lezione hanno qui gli stessi commenti.
+DA UTILIZZARE OGGI: il programma completo (si usa, non si studia, in questo corso).
 Per il docente: code/l14.S, come viene compilato ed eseguito dai test. I commenti fanno parte del programma, e sono in inglese come in tutti i listati: leggeteli con il codice.</a:t>
             </a:r>
             <a:endParaRPr lang="en-US" dirty="0"/>
@@ -1903,6 +1916,7 @@
             <a:r>
               <a:rPr lang="en-US" dirty="0"/>
               <a:t>Una pagina del programma completo, esattamente com'è nel repository. Leggetelo dall'inizio: l'intestazione dice che cosa mostra il programma e come compilarlo; seguono le tre funzioni init, update e draw, poi i dati. Le righe incontrate nei listati della lezione hanno qui gli stessi commenti.
+DA UTILIZZARE OGGI: il programma completo (si usa, non si studia, in questo corso).
 Per il docente: code/l14.S, come viene compilato ed eseguito dai test. I commenti fanno parte del programma, e sono in inglese come in tutti i listati: leggeteli con il codice.</a:t>
             </a:r>
             <a:endParaRPr lang="en-US" dirty="0"/>
@@ -1992,6 +2006,7 @@
             <a:r>
               <a:rPr lang="en-US" dirty="0"/>
               <a:t>Una pagina del programma completo, esattamente com'è nel repository. Leggetelo dall'inizio: l'intestazione dice che cosa mostra il programma e come compilarlo; seguono le tre funzioni init, update e draw, poi i dati. Le righe incontrate nei listati della lezione hanno qui gli stessi commenti.
+DA UTILIZZARE OGGI: il programma completo (si usa, non si studia, in questo corso).
 Per il docente: code/l14.S, come viene compilato ed eseguito dai test. I commenti fanno parte del programma, e sono in inglese come in tutti i listati: leggeteli con il codice.</a:t>
             </a:r>
             <a:endParaRPr lang="en-US" dirty="0"/>
@@ -3073,6 +3088,420 @@
       </p:pic>
       <p:sp>
         <p:nvSpPr>
+          <p:cNvPr id="14" name="Shape 11"/>
+          <p:cNvSpPr/>
+          <p:nvPr/>
+        </p:nvSpPr>
+        <p:spPr>
+          <a:xfrm>
+            <a:off x="8910777" y="91440"/>
+            <a:ext cx="2732278" cy="274320"/>
+          </a:xfrm>
+          <a:prstGeom prst="rect">
+            <a:avLst/>
+          </a:prstGeom>
+          <a:solidFill>
+            <a:srgbClr val="F3E8FF"/>
+          </a:solidFill>
+          <a:ln w="12700">
+            <a:solidFill>
+              <a:srgbClr val="7E22CE"/>
+            </a:solidFill>
+            <a:prstDash val="dash"/>
+          </a:ln>
+        </p:spPr>
+      </p:sp>
+      <p:sp>
+        <p:nvSpPr>
+          <p:cNvPr id="15" name="Shape 12"/>
+          <p:cNvSpPr/>
+          <p:nvPr/>
+        </p:nvSpPr>
+        <p:spPr>
+          <a:xfrm>
+            <a:off x="8938209" y="128016"/>
+            <a:ext cx="45720" cy="45720"/>
+          </a:xfrm>
+          <a:prstGeom prst="rect">
+            <a:avLst/>
+          </a:prstGeom>
+          <a:solidFill>
+            <a:srgbClr val="7E22CE"/>
+          </a:solidFill>
+          <a:ln w="12700">
+            <a:solidFill>
+              <a:srgbClr val="7E22CE"/>
+            </a:solidFill>
+            <a:prstDash val="solid"/>
+          </a:ln>
+        </p:spPr>
+      </p:sp>
+      <p:sp>
+        <p:nvSpPr>
+          <p:cNvPr id="16" name="Shape 13"/>
+          <p:cNvSpPr/>
+          <p:nvPr/>
+        </p:nvSpPr>
+        <p:spPr>
+          <a:xfrm>
+            <a:off x="8938209" y="205740"/>
+            <a:ext cx="45720" cy="45720"/>
+          </a:xfrm>
+          <a:prstGeom prst="rect">
+            <a:avLst/>
+          </a:prstGeom>
+          <a:solidFill>
+            <a:srgbClr val="7E22CE"/>
+          </a:solidFill>
+          <a:ln w="12700">
+            <a:solidFill>
+              <a:srgbClr val="7E22CE"/>
+            </a:solidFill>
+            <a:prstDash val="solid"/>
+          </a:ln>
+        </p:spPr>
+      </p:sp>
+      <p:sp>
+        <p:nvSpPr>
+          <p:cNvPr id="17" name="Shape 14"/>
+          <p:cNvSpPr/>
+          <p:nvPr/>
+        </p:nvSpPr>
+        <p:spPr>
+          <a:xfrm>
+            <a:off x="8938209" y="283464"/>
+            <a:ext cx="45720" cy="45720"/>
+          </a:xfrm>
+          <a:prstGeom prst="rect">
+            <a:avLst/>
+          </a:prstGeom>
+          <a:solidFill>
+            <a:srgbClr val="7E22CE"/>
+          </a:solidFill>
+          <a:ln w="12700">
+            <a:solidFill>
+              <a:srgbClr val="7E22CE"/>
+            </a:solidFill>
+            <a:prstDash val="solid"/>
+          </a:ln>
+        </p:spPr>
+      </p:sp>
+      <p:pic>
+        <p:nvPicPr>
+          <p:cNvPr id="18" name="Image 1" descr="preencoded.png">    </p:cNvPr>
+          <p:cNvPicPr>
+            <a:picLocks noChangeAspect="1"/>
+          </p:cNvPicPr>
+          <p:nvPr/>
+        </p:nvPicPr>
+        <p:blipFill>
+          <a:blip r:embed="rId2"/>
+          <a:stretch>
+            <a:fillRect/>
+          </a:stretch>
+        </p:blipFill>
+        <p:spPr>
+          <a:xfrm>
+            <a:off x="9038793" y="128016"/>
+            <a:ext cx="201168" cy="201168"/>
+          </a:xfrm>
+          <a:prstGeom prst="rect">
+            <a:avLst/>
+          </a:prstGeom>
+        </p:spPr>
+      </p:pic>
+      <p:sp>
+        <p:nvSpPr>
+          <p:cNvPr id="19" name="Text 15"/>
+          <p:cNvSpPr txBox="1"/>
+          <p:nvPr/>
+        </p:nvSpPr>
+        <p:spPr>
+          <a:xfrm>
+            <a:off x="9294825" y="91440"/>
+            <a:ext cx="2311654" cy="274320"/>
+          </a:xfrm>
+          <a:prstGeom prst="rect">
+            <a:avLst/>
+          </a:prstGeom>
+          <a:noFill/>
+          <a:ln/>
+        </p:spPr>
+        <p:txBody>
+          <a:bodyPr wrap="square" lIns="0" tIns="0" rIns="0" bIns="0" rtlCol="0" anchor="ctr"/>
+          <a:lstStyle/>
+          <a:p>
+            <a:pPr indent="0" marL="0">
+              <a:buNone/>
+            </a:pPr>
+            <a:r>
+              <a:rPr lang="en-US" sz="1100" b="1" dirty="0">
+                <a:solidFill>
+                  <a:srgbClr val="6B21A8"/>
+                </a:solidFill>
+                <a:latin typeface="Calibri" pitchFamily="34" charset="0"/>
+                <a:ea typeface="Calibri" pitchFamily="34" charset="-122"/>
+                <a:cs typeface="Calibri" pitchFamily="34" charset="-120"/>
+              </a:rPr>
+              <a:t>DA COMPRENDERE PIÙ AVANTI</a:t>
+            </a:r>
+            <a:endParaRPr lang="en-US" sz="1100" dirty="0"/>
+          </a:p>
+        </p:txBody>
+      </p:sp>
+      <p:sp>
+        <p:nvSpPr>
+          <p:cNvPr id="20" name="Shape 16"/>
+          <p:cNvSpPr/>
+          <p:nvPr/>
+        </p:nvSpPr>
+        <p:spPr>
+          <a:xfrm>
+            <a:off x="6675069" y="91440"/>
+            <a:ext cx="2125980" cy="274320"/>
+          </a:xfrm>
+          <a:prstGeom prst="rect">
+            <a:avLst/>
+          </a:prstGeom>
+          <a:solidFill>
+            <a:srgbClr val="FEF3C7"/>
+          </a:solidFill>
+          <a:ln w="12700">
+            <a:solidFill>
+              <a:srgbClr val="B45309"/>
+            </a:solidFill>
+            <a:prstDash val="solid"/>
+          </a:ln>
+        </p:spPr>
+      </p:sp>
+      <p:sp>
+        <p:nvSpPr>
+          <p:cNvPr id="21" name="Shape 17"/>
+          <p:cNvSpPr/>
+          <p:nvPr/>
+        </p:nvSpPr>
+        <p:spPr>
+          <a:xfrm>
+            <a:off x="6675069" y="91440"/>
+            <a:ext cx="27432" cy="274320"/>
+          </a:xfrm>
+          <a:prstGeom prst="rect">
+            <a:avLst/>
+          </a:prstGeom>
+          <a:solidFill>
+            <a:srgbClr val="B45309"/>
+          </a:solidFill>
+          <a:ln w="12700">
+            <a:solidFill>
+              <a:srgbClr val="B45309"/>
+            </a:solidFill>
+            <a:prstDash val="solid"/>
+          </a:ln>
+        </p:spPr>
+      </p:sp>
+      <p:sp>
+        <p:nvSpPr>
+          <p:cNvPr id="22" name="Shape 18"/>
+          <p:cNvSpPr/>
+          <p:nvPr/>
+        </p:nvSpPr>
+        <p:spPr>
+          <a:xfrm>
+            <a:off x="6729933" y="91440"/>
+            <a:ext cx="27432" cy="274320"/>
+          </a:xfrm>
+          <a:prstGeom prst="rect">
+            <a:avLst/>
+          </a:prstGeom>
+          <a:solidFill>
+            <a:srgbClr val="B45309"/>
+          </a:solidFill>
+          <a:ln w="12700">
+            <a:solidFill>
+              <a:srgbClr val="B45309"/>
+            </a:solidFill>
+            <a:prstDash val="solid"/>
+          </a:ln>
+        </p:spPr>
+      </p:sp>
+      <p:pic>
+        <p:nvPicPr>
+          <p:cNvPr id="23" name="Image 2" descr="preencoded.png">    </p:cNvPr>
+          <p:cNvPicPr>
+            <a:picLocks noChangeAspect="1"/>
+          </p:cNvPicPr>
+          <p:nvPr/>
+        </p:nvPicPr>
+        <p:blipFill>
+          <a:blip r:embed="rId3"/>
+          <a:stretch>
+            <a:fillRect/>
+          </a:stretch>
+        </p:blipFill>
+        <p:spPr>
+          <a:xfrm>
+            <a:off x="6803085" y="128016"/>
+            <a:ext cx="201168" cy="201168"/>
+          </a:xfrm>
+          <a:prstGeom prst="rect">
+            <a:avLst/>
+          </a:prstGeom>
+        </p:spPr>
+      </p:pic>
+      <p:sp>
+        <p:nvSpPr>
+          <p:cNvPr id="24" name="Text 19"/>
+          <p:cNvSpPr txBox="1"/>
+          <p:nvPr/>
+        </p:nvSpPr>
+        <p:spPr>
+          <a:xfrm>
+            <a:off x="7059117" y="91440"/>
+            <a:ext cx="1705356" cy="274320"/>
+          </a:xfrm>
+          <a:prstGeom prst="rect">
+            <a:avLst/>
+          </a:prstGeom>
+          <a:noFill/>
+          <a:ln/>
+        </p:spPr>
+        <p:txBody>
+          <a:bodyPr wrap="square" lIns="0" tIns="0" rIns="0" bIns="0" rtlCol="0" anchor="ctr"/>
+          <a:lstStyle/>
+          <a:p>
+            <a:pPr indent="0" marL="0">
+              <a:buNone/>
+            </a:pPr>
+            <a:r>
+              <a:rPr lang="en-US" sz="1100" b="1" dirty="0">
+                <a:solidFill>
+                  <a:srgbClr val="92400E"/>
+                </a:solidFill>
+                <a:latin typeface="Calibri" pitchFamily="34" charset="0"/>
+                <a:ea typeface="Calibri" pitchFamily="34" charset="-122"/>
+                <a:cs typeface="Calibri" pitchFamily="34" charset="-120"/>
+              </a:rPr>
+              <a:t>DA UTILIZZARE OGGI</a:t>
+            </a:r>
+            <a:endParaRPr lang="en-US" sz="1100" dirty="0"/>
+          </a:p>
+        </p:txBody>
+      </p:sp>
+      <p:sp>
+        <p:nvSpPr>
+          <p:cNvPr id="25" name="Shape 20"/>
+          <p:cNvSpPr/>
+          <p:nvPr/>
+        </p:nvSpPr>
+        <p:spPr>
+          <a:xfrm>
+            <a:off x="4352747" y="91440"/>
+            <a:ext cx="2212594" cy="274320"/>
+          </a:xfrm>
+          <a:prstGeom prst="rect">
+            <a:avLst/>
+          </a:prstGeom>
+          <a:solidFill>
+            <a:srgbClr val="E0F2FE"/>
+          </a:solidFill>
+          <a:ln w="12700">
+            <a:solidFill>
+              <a:srgbClr val="0369A1"/>
+            </a:solidFill>
+            <a:prstDash val="solid"/>
+          </a:ln>
+        </p:spPr>
+      </p:sp>
+      <p:sp>
+        <p:nvSpPr>
+          <p:cNvPr id="26" name="Shape 21"/>
+          <p:cNvSpPr/>
+          <p:nvPr/>
+        </p:nvSpPr>
+        <p:spPr>
+          <a:xfrm>
+            <a:off x="4352747" y="91440"/>
+            <a:ext cx="73152" cy="274320"/>
+          </a:xfrm>
+          <a:prstGeom prst="rect">
+            <a:avLst/>
+          </a:prstGeom>
+          <a:solidFill>
+            <a:srgbClr val="0369A1"/>
+          </a:solidFill>
+          <a:ln w="12700">
+            <a:solidFill>
+              <a:srgbClr val="0369A1"/>
+            </a:solidFill>
+            <a:prstDash val="solid"/>
+          </a:ln>
+        </p:spPr>
+      </p:sp>
+      <p:pic>
+        <p:nvPicPr>
+          <p:cNvPr id="27" name="Image 3" descr="preencoded.png">    </p:cNvPr>
+          <p:cNvPicPr>
+            <a:picLocks noChangeAspect="1"/>
+          </p:cNvPicPr>
+          <p:nvPr/>
+        </p:nvPicPr>
+        <p:blipFill>
+          <a:blip r:embed="rId4"/>
+          <a:stretch>
+            <a:fillRect/>
+          </a:stretch>
+        </p:blipFill>
+        <p:spPr>
+          <a:xfrm>
+            <a:off x="4480763" y="128016"/>
+            <a:ext cx="201168" cy="201168"/>
+          </a:xfrm>
+          <a:prstGeom prst="rect">
+            <a:avLst/>
+          </a:prstGeom>
+        </p:spPr>
+      </p:pic>
+      <p:sp>
+        <p:nvSpPr>
+          <p:cNvPr id="28" name="Text 22"/>
+          <p:cNvSpPr txBox="1"/>
+          <p:nvPr/>
+        </p:nvSpPr>
+        <p:spPr>
+          <a:xfrm>
+            <a:off x="4736795" y="91440"/>
+            <a:ext cx="1791970" cy="274320"/>
+          </a:xfrm>
+          <a:prstGeom prst="rect">
+            <a:avLst/>
+          </a:prstGeom>
+          <a:noFill/>
+          <a:ln/>
+        </p:spPr>
+        <p:txBody>
+          <a:bodyPr wrap="square" lIns="0" tIns="0" rIns="0" bIns="0" rtlCol="0" anchor="ctr"/>
+          <a:lstStyle/>
+          <a:p>
+            <a:pPr indent="0" marL="0">
+              <a:buNone/>
+            </a:pPr>
+            <a:r>
+              <a:rPr lang="en-US" sz="1100" b="1" dirty="0">
+                <a:solidFill>
+                  <a:srgbClr val="075985"/>
+                </a:solidFill>
+                <a:latin typeface="Calibri" pitchFamily="34" charset="0"/>
+                <a:ea typeface="Calibri" pitchFamily="34" charset="-122"/>
+                <a:cs typeface="Calibri" pitchFamily="34" charset="-120"/>
+              </a:rPr>
+              <a:t>DA COMPRENDERE OGGI</a:t>
+            </a:r>
+            <a:endParaRPr lang="en-US" sz="1100" dirty="0"/>
+          </a:p>
+        </p:txBody>
+      </p:sp>
+      <p:sp>
+        <p:nvSpPr>
           <p:cNvPr id="25" name="Slide Number Placeholder 0"/>
           <p:cNvSpPr>
             <a:spLocks noGrp="1"/>
@@ -3437,6 +3866,158 @@
       </p:sp>
       <p:sp>
         <p:nvSpPr>
+          <p:cNvPr id="5" name="Shape 3"/>
+          <p:cNvSpPr/>
+          <p:nvPr/>
+        </p:nvSpPr>
+        <p:spPr>
+          <a:xfrm>
+            <a:off x="7941259" y="91440"/>
+            <a:ext cx="3701796" cy="274320"/>
+          </a:xfrm>
+          <a:prstGeom prst="rect">
+            <a:avLst/>
+          </a:prstGeom>
+          <a:solidFill>
+            <a:srgbClr val="FEF3C7"/>
+          </a:solidFill>
+          <a:ln w="12700">
+            <a:solidFill>
+              <a:srgbClr val="B45309"/>
+            </a:solidFill>
+            <a:prstDash val="solid"/>
+          </a:ln>
+        </p:spPr>
+      </p:sp>
+      <p:sp>
+        <p:nvSpPr>
+          <p:cNvPr id="6" name="Shape 4"/>
+          <p:cNvSpPr/>
+          <p:nvPr/>
+        </p:nvSpPr>
+        <p:spPr>
+          <a:xfrm>
+            <a:off x="7941259" y="91440"/>
+            <a:ext cx="27432" cy="274320"/>
+          </a:xfrm>
+          <a:prstGeom prst="rect">
+            <a:avLst/>
+          </a:prstGeom>
+          <a:solidFill>
+            <a:srgbClr val="B45309"/>
+          </a:solidFill>
+          <a:ln w="12700">
+            <a:solidFill>
+              <a:srgbClr val="B45309"/>
+            </a:solidFill>
+            <a:prstDash val="solid"/>
+          </a:ln>
+        </p:spPr>
+      </p:sp>
+      <p:sp>
+        <p:nvSpPr>
+          <p:cNvPr id="7" name="Shape 5"/>
+          <p:cNvSpPr/>
+          <p:nvPr/>
+        </p:nvSpPr>
+        <p:spPr>
+          <a:xfrm>
+            <a:off x="7996123" y="91440"/>
+            <a:ext cx="27432" cy="274320"/>
+          </a:xfrm>
+          <a:prstGeom prst="rect">
+            <a:avLst/>
+          </a:prstGeom>
+          <a:solidFill>
+            <a:srgbClr val="B45309"/>
+          </a:solidFill>
+          <a:ln w="12700">
+            <a:solidFill>
+              <a:srgbClr val="B45309"/>
+            </a:solidFill>
+            <a:prstDash val="solid"/>
+          </a:ln>
+        </p:spPr>
+      </p:sp>
+      <p:pic>
+        <p:nvPicPr>
+          <p:cNvPr id="8" name="Image 0" descr="preencoded.png">    </p:cNvPr>
+          <p:cNvPicPr>
+            <a:picLocks noChangeAspect="1"/>
+          </p:cNvPicPr>
+          <p:nvPr/>
+        </p:nvPicPr>
+        <p:blipFill>
+          <a:blip r:embed="rId1"/>
+          <a:stretch>
+            <a:fillRect/>
+          </a:stretch>
+        </p:blipFill>
+        <p:spPr>
+          <a:xfrm>
+            <a:off x="8069275" y="128016"/>
+            <a:ext cx="201168" cy="201168"/>
+          </a:xfrm>
+          <a:prstGeom prst="rect">
+            <a:avLst/>
+          </a:prstGeom>
+        </p:spPr>
+      </p:pic>
+      <p:sp>
+        <p:nvSpPr>
+          <p:cNvPr id="9" name="Text 6"/>
+          <p:cNvSpPr txBox="1"/>
+          <p:nvPr/>
+        </p:nvSpPr>
+        <p:spPr>
+          <a:xfrm>
+            <a:off x="8325307" y="91440"/>
+            <a:ext cx="3281172" cy="274320"/>
+          </a:xfrm>
+          <a:prstGeom prst="rect">
+            <a:avLst/>
+          </a:prstGeom>
+          <a:noFill/>
+          <a:ln/>
+        </p:spPr>
+        <p:txBody>
+          <a:bodyPr wrap="square" lIns="0" tIns="0" rIns="0" bIns="0" rtlCol="0" anchor="ctr"/>
+          <a:lstStyle/>
+          <a:p>
+            <a:pPr indent="0" marL="0">
+              <a:buNone/>
+            </a:pPr>
+            <a:r>
+              <a:rPr lang="en-US" sz="1100" b="1" dirty="0">
+                <a:solidFill>
+                  <a:srgbClr val="92400E"/>
+                </a:solidFill>
+                <a:latin typeface="Calibri" pitchFamily="34" charset="0"/>
+                <a:ea typeface="Calibri" pitchFamily="34" charset="-122"/>
+                <a:cs typeface="Calibri" pitchFamily="34" charset="-120"/>
+              </a:rPr>
+              <a:t>DA UTILIZZARE OGGI</a:t>
+            </a:r>
+            <a:pPr indent="0" marL="0">
+              <a:buNone/>
+            </a:pPr>
+            <a:r>
+              <a:rPr lang="en-US" sz="1100" dirty="0">
+                <a:solidFill>
+                  <a:srgbClr val="92400E"/>
+                </a:solidFill>
+                <a:latin typeface="Calibri" pitchFamily="34" charset="0"/>
+                <a:ea typeface="Calibri" pitchFamily="34" charset="-122"/>
+                <a:cs typeface="Calibri" pitchFamily="34" charset="-120"/>
+              </a:rPr>
+              <a:t> · il programma completo</a:t>
+            </a:r>
+            <a:endParaRPr lang="en-US" sz="1100" dirty="0"/>
+          </a:p>
+        </p:txBody>
+      </p:sp>
+      <p:sp>
+        <p:nvSpPr>
           <p:cNvPr id="25" name="Slide Number Placeholder 0"/>
           <p:cNvSpPr>
             <a:spLocks noGrp="1"/>
@@ -3886,6 +4467,158 @@
       </p:sp>
       <p:sp>
         <p:nvSpPr>
+          <p:cNvPr id="5" name="Shape 3"/>
+          <p:cNvSpPr/>
+          <p:nvPr/>
+        </p:nvSpPr>
+        <p:spPr>
+          <a:xfrm>
+            <a:off x="7941259" y="91440"/>
+            <a:ext cx="3701796" cy="274320"/>
+          </a:xfrm>
+          <a:prstGeom prst="rect">
+            <a:avLst/>
+          </a:prstGeom>
+          <a:solidFill>
+            <a:srgbClr val="FEF3C7"/>
+          </a:solidFill>
+          <a:ln w="12700">
+            <a:solidFill>
+              <a:srgbClr val="B45309"/>
+            </a:solidFill>
+            <a:prstDash val="solid"/>
+          </a:ln>
+        </p:spPr>
+      </p:sp>
+      <p:sp>
+        <p:nvSpPr>
+          <p:cNvPr id="6" name="Shape 4"/>
+          <p:cNvSpPr/>
+          <p:nvPr/>
+        </p:nvSpPr>
+        <p:spPr>
+          <a:xfrm>
+            <a:off x="7941259" y="91440"/>
+            <a:ext cx="27432" cy="274320"/>
+          </a:xfrm>
+          <a:prstGeom prst="rect">
+            <a:avLst/>
+          </a:prstGeom>
+          <a:solidFill>
+            <a:srgbClr val="B45309"/>
+          </a:solidFill>
+          <a:ln w="12700">
+            <a:solidFill>
+              <a:srgbClr val="B45309"/>
+            </a:solidFill>
+            <a:prstDash val="solid"/>
+          </a:ln>
+        </p:spPr>
+      </p:sp>
+      <p:sp>
+        <p:nvSpPr>
+          <p:cNvPr id="7" name="Shape 5"/>
+          <p:cNvSpPr/>
+          <p:nvPr/>
+        </p:nvSpPr>
+        <p:spPr>
+          <a:xfrm>
+            <a:off x="7996123" y="91440"/>
+            <a:ext cx="27432" cy="274320"/>
+          </a:xfrm>
+          <a:prstGeom prst="rect">
+            <a:avLst/>
+          </a:prstGeom>
+          <a:solidFill>
+            <a:srgbClr val="B45309"/>
+          </a:solidFill>
+          <a:ln w="12700">
+            <a:solidFill>
+              <a:srgbClr val="B45309"/>
+            </a:solidFill>
+            <a:prstDash val="solid"/>
+          </a:ln>
+        </p:spPr>
+      </p:sp>
+      <p:pic>
+        <p:nvPicPr>
+          <p:cNvPr id="8" name="Image 0" descr="preencoded.png">    </p:cNvPr>
+          <p:cNvPicPr>
+            <a:picLocks noChangeAspect="1"/>
+          </p:cNvPicPr>
+          <p:nvPr/>
+        </p:nvPicPr>
+        <p:blipFill>
+          <a:blip r:embed="rId1"/>
+          <a:stretch>
+            <a:fillRect/>
+          </a:stretch>
+        </p:blipFill>
+        <p:spPr>
+          <a:xfrm>
+            <a:off x="8069275" y="128016"/>
+            <a:ext cx="201168" cy="201168"/>
+          </a:xfrm>
+          <a:prstGeom prst="rect">
+            <a:avLst/>
+          </a:prstGeom>
+        </p:spPr>
+      </p:pic>
+      <p:sp>
+        <p:nvSpPr>
+          <p:cNvPr id="9" name="Text 6"/>
+          <p:cNvSpPr txBox="1"/>
+          <p:nvPr/>
+        </p:nvSpPr>
+        <p:spPr>
+          <a:xfrm>
+            <a:off x="8325307" y="91440"/>
+            <a:ext cx="3281172" cy="274320"/>
+          </a:xfrm>
+          <a:prstGeom prst="rect">
+            <a:avLst/>
+          </a:prstGeom>
+          <a:noFill/>
+          <a:ln/>
+        </p:spPr>
+        <p:txBody>
+          <a:bodyPr wrap="square" lIns="0" tIns="0" rIns="0" bIns="0" rtlCol="0" anchor="ctr"/>
+          <a:lstStyle/>
+          <a:p>
+            <a:pPr indent="0" marL="0">
+              <a:buNone/>
+            </a:pPr>
+            <a:r>
+              <a:rPr lang="en-US" sz="1100" b="1" dirty="0">
+                <a:solidFill>
+                  <a:srgbClr val="92400E"/>
+                </a:solidFill>
+                <a:latin typeface="Calibri" pitchFamily="34" charset="0"/>
+                <a:ea typeface="Calibri" pitchFamily="34" charset="-122"/>
+                <a:cs typeface="Calibri" pitchFamily="34" charset="-120"/>
+              </a:rPr>
+              <a:t>DA UTILIZZARE OGGI</a:t>
+            </a:r>
+            <a:pPr indent="0" marL="0">
+              <a:buNone/>
+            </a:pPr>
+            <a:r>
+              <a:rPr lang="en-US" sz="1100" dirty="0">
+                <a:solidFill>
+                  <a:srgbClr val="92400E"/>
+                </a:solidFill>
+                <a:latin typeface="Calibri" pitchFamily="34" charset="0"/>
+                <a:ea typeface="Calibri" pitchFamily="34" charset="-122"/>
+                <a:cs typeface="Calibri" pitchFamily="34" charset="-120"/>
+              </a:rPr>
+              <a:t> · il programma completo</a:t>
+            </a:r>
+            <a:endParaRPr lang="en-US" sz="1100" dirty="0"/>
+          </a:p>
+        </p:txBody>
+      </p:sp>
+      <p:sp>
+        <p:nvSpPr>
           <p:cNvPr id="25" name="Slide Number Placeholder 0"/>
           <p:cNvSpPr>
             <a:spLocks noGrp="1"/>
@@ -5039,6 +5772,158 @@
       </p:sp>
       <p:sp>
         <p:nvSpPr>
+          <p:cNvPr id="17" name="Shape 15"/>
+          <p:cNvSpPr/>
+          <p:nvPr/>
+        </p:nvSpPr>
+        <p:spPr>
+          <a:xfrm>
+            <a:off x="7875600" y="91440"/>
+            <a:ext cx="3767455" cy="274320"/>
+          </a:xfrm>
+          <a:prstGeom prst="rect">
+            <a:avLst/>
+          </a:prstGeom>
+          <a:solidFill>
+            <a:srgbClr val="FEF3C7"/>
+          </a:solidFill>
+          <a:ln w="12700">
+            <a:solidFill>
+              <a:srgbClr val="B45309"/>
+            </a:solidFill>
+            <a:prstDash val="solid"/>
+          </a:ln>
+        </p:spPr>
+      </p:sp>
+      <p:sp>
+        <p:nvSpPr>
+          <p:cNvPr id="18" name="Shape 16"/>
+          <p:cNvSpPr/>
+          <p:nvPr/>
+        </p:nvSpPr>
+        <p:spPr>
+          <a:xfrm>
+            <a:off x="7875600" y="91440"/>
+            <a:ext cx="27432" cy="274320"/>
+          </a:xfrm>
+          <a:prstGeom prst="rect">
+            <a:avLst/>
+          </a:prstGeom>
+          <a:solidFill>
+            <a:srgbClr val="B45309"/>
+          </a:solidFill>
+          <a:ln w="12700">
+            <a:solidFill>
+              <a:srgbClr val="B45309"/>
+            </a:solidFill>
+            <a:prstDash val="solid"/>
+          </a:ln>
+        </p:spPr>
+      </p:sp>
+      <p:sp>
+        <p:nvSpPr>
+          <p:cNvPr id="19" name="Shape 17"/>
+          <p:cNvSpPr/>
+          <p:nvPr/>
+        </p:nvSpPr>
+        <p:spPr>
+          <a:xfrm>
+            <a:off x="7930464" y="91440"/>
+            <a:ext cx="27432" cy="274320"/>
+          </a:xfrm>
+          <a:prstGeom prst="rect">
+            <a:avLst/>
+          </a:prstGeom>
+          <a:solidFill>
+            <a:srgbClr val="B45309"/>
+          </a:solidFill>
+          <a:ln w="12700">
+            <a:solidFill>
+              <a:srgbClr val="B45309"/>
+            </a:solidFill>
+            <a:prstDash val="solid"/>
+          </a:ln>
+        </p:spPr>
+      </p:sp>
+      <p:pic>
+        <p:nvPicPr>
+          <p:cNvPr id="20" name="Image 0" descr="preencoded.png">    </p:cNvPr>
+          <p:cNvPicPr>
+            <a:picLocks noChangeAspect="1"/>
+          </p:cNvPicPr>
+          <p:nvPr/>
+        </p:nvPicPr>
+        <p:blipFill>
+          <a:blip r:embed="rId1"/>
+          <a:stretch>
+            <a:fillRect/>
+          </a:stretch>
+        </p:blipFill>
+        <p:spPr>
+          <a:xfrm>
+            <a:off x="8003616" y="128016"/>
+            <a:ext cx="201168" cy="201168"/>
+          </a:xfrm>
+          <a:prstGeom prst="rect">
+            <a:avLst/>
+          </a:prstGeom>
+        </p:spPr>
+      </p:pic>
+      <p:sp>
+        <p:nvSpPr>
+          <p:cNvPr id="21" name="Text 18"/>
+          <p:cNvSpPr txBox="1"/>
+          <p:nvPr/>
+        </p:nvSpPr>
+        <p:spPr>
+          <a:xfrm>
+            <a:off x="8259648" y="91440"/>
+            <a:ext cx="3346831" cy="274320"/>
+          </a:xfrm>
+          <a:prstGeom prst="rect">
+            <a:avLst/>
+          </a:prstGeom>
+          <a:noFill/>
+          <a:ln/>
+        </p:spPr>
+        <p:txBody>
+          <a:bodyPr wrap="square" lIns="0" tIns="0" rIns="0" bIns="0" rtlCol="0" anchor="ctr"/>
+          <a:lstStyle/>
+          <a:p>
+            <a:pPr indent="0" marL="0">
+              <a:buNone/>
+            </a:pPr>
+            <a:r>
+              <a:rPr lang="en-US" sz="1100" b="1" dirty="0">
+                <a:solidFill>
+                  <a:srgbClr val="92400E"/>
+                </a:solidFill>
+                <a:latin typeface="Calibri" pitchFamily="34" charset="0"/>
+                <a:ea typeface="Calibri" pitchFamily="34" charset="-122"/>
+                <a:cs typeface="Calibri" pitchFamily="34" charset="-120"/>
+              </a:rPr>
+              <a:t>DA UTILIZZARE OGGI</a:t>
+            </a:r>
+            <a:pPr indent="0" marL="0">
+              <a:buNone/>
+            </a:pPr>
+            <a:r>
+              <a:rPr lang="en-US" sz="1100" dirty="0">
+                <a:solidFill>
+                  <a:srgbClr val="92400E"/>
+                </a:solidFill>
+                <a:latin typeface="Calibri" pitchFamily="34" charset="0"/>
+                <a:ea typeface="Calibri" pitchFamily="34" charset="-122"/>
+                <a:cs typeface="Calibri" pitchFamily="34" charset="-120"/>
+              </a:rPr>
+              <a:t> · gli strumenti di PRG32</a:t>
+            </a:r>
+            <a:endParaRPr lang="en-US" sz="1100" dirty="0"/>
+          </a:p>
+        </p:txBody>
+      </p:sp>
+      <p:sp>
+        <p:nvSpPr>
           <p:cNvPr id="25" name="Slide Number Placeholder 0"/>
           <p:cNvSpPr>
             <a:spLocks noGrp="1"/>
@@ -5875,6 +6760,158 @@
       </p:sp>
       <p:sp>
         <p:nvSpPr>
+          <p:cNvPr id="17" name="Shape 15"/>
+          <p:cNvSpPr/>
+          <p:nvPr/>
+        </p:nvSpPr>
+        <p:spPr>
+          <a:xfrm>
+            <a:off x="7875600" y="91440"/>
+            <a:ext cx="3767455" cy="274320"/>
+          </a:xfrm>
+          <a:prstGeom prst="rect">
+            <a:avLst/>
+          </a:prstGeom>
+          <a:solidFill>
+            <a:srgbClr val="FEF3C7"/>
+          </a:solidFill>
+          <a:ln w="12700">
+            <a:solidFill>
+              <a:srgbClr val="B45309"/>
+            </a:solidFill>
+            <a:prstDash val="solid"/>
+          </a:ln>
+        </p:spPr>
+      </p:sp>
+      <p:sp>
+        <p:nvSpPr>
+          <p:cNvPr id="18" name="Shape 16"/>
+          <p:cNvSpPr/>
+          <p:nvPr/>
+        </p:nvSpPr>
+        <p:spPr>
+          <a:xfrm>
+            <a:off x="7875600" y="91440"/>
+            <a:ext cx="27432" cy="274320"/>
+          </a:xfrm>
+          <a:prstGeom prst="rect">
+            <a:avLst/>
+          </a:prstGeom>
+          <a:solidFill>
+            <a:srgbClr val="B45309"/>
+          </a:solidFill>
+          <a:ln w="12700">
+            <a:solidFill>
+              <a:srgbClr val="B45309"/>
+            </a:solidFill>
+            <a:prstDash val="solid"/>
+          </a:ln>
+        </p:spPr>
+      </p:sp>
+      <p:sp>
+        <p:nvSpPr>
+          <p:cNvPr id="19" name="Shape 17"/>
+          <p:cNvSpPr/>
+          <p:nvPr/>
+        </p:nvSpPr>
+        <p:spPr>
+          <a:xfrm>
+            <a:off x="7930464" y="91440"/>
+            <a:ext cx="27432" cy="274320"/>
+          </a:xfrm>
+          <a:prstGeom prst="rect">
+            <a:avLst/>
+          </a:prstGeom>
+          <a:solidFill>
+            <a:srgbClr val="B45309"/>
+          </a:solidFill>
+          <a:ln w="12700">
+            <a:solidFill>
+              <a:srgbClr val="B45309"/>
+            </a:solidFill>
+            <a:prstDash val="solid"/>
+          </a:ln>
+        </p:spPr>
+      </p:sp>
+      <p:pic>
+        <p:nvPicPr>
+          <p:cNvPr id="20" name="Image 0" descr="preencoded.png">    </p:cNvPr>
+          <p:cNvPicPr>
+            <a:picLocks noChangeAspect="1"/>
+          </p:cNvPicPr>
+          <p:nvPr/>
+        </p:nvPicPr>
+        <p:blipFill>
+          <a:blip r:embed="rId1"/>
+          <a:stretch>
+            <a:fillRect/>
+          </a:stretch>
+        </p:blipFill>
+        <p:spPr>
+          <a:xfrm>
+            <a:off x="8003616" y="128016"/>
+            <a:ext cx="201168" cy="201168"/>
+          </a:xfrm>
+          <a:prstGeom prst="rect">
+            <a:avLst/>
+          </a:prstGeom>
+        </p:spPr>
+      </p:pic>
+      <p:sp>
+        <p:nvSpPr>
+          <p:cNvPr id="21" name="Text 18"/>
+          <p:cNvSpPr txBox="1"/>
+          <p:nvPr/>
+        </p:nvSpPr>
+        <p:spPr>
+          <a:xfrm>
+            <a:off x="8259648" y="91440"/>
+            <a:ext cx="3346831" cy="274320"/>
+          </a:xfrm>
+          <a:prstGeom prst="rect">
+            <a:avLst/>
+          </a:prstGeom>
+          <a:noFill/>
+          <a:ln/>
+        </p:spPr>
+        <p:txBody>
+          <a:bodyPr wrap="square" lIns="0" tIns="0" rIns="0" bIns="0" rtlCol="0" anchor="ctr"/>
+          <a:lstStyle/>
+          <a:p>
+            <a:pPr indent="0" marL="0">
+              <a:buNone/>
+            </a:pPr>
+            <a:r>
+              <a:rPr lang="en-US" sz="1100" b="1" dirty="0">
+                <a:solidFill>
+                  <a:srgbClr val="92400E"/>
+                </a:solidFill>
+                <a:latin typeface="Calibri" pitchFamily="34" charset="0"/>
+                <a:ea typeface="Calibri" pitchFamily="34" charset="-122"/>
+                <a:cs typeface="Calibri" pitchFamily="34" charset="-120"/>
+              </a:rPr>
+              <a:t>DA UTILIZZARE OGGI</a:t>
+            </a:r>
+            <a:pPr indent="0" marL="0">
+              <a:buNone/>
+            </a:pPr>
+            <a:r>
+              <a:rPr lang="en-US" sz="1100" dirty="0">
+                <a:solidFill>
+                  <a:srgbClr val="92400E"/>
+                </a:solidFill>
+                <a:latin typeface="Calibri" pitchFamily="34" charset="0"/>
+                <a:ea typeface="Calibri" pitchFamily="34" charset="-122"/>
+                <a:cs typeface="Calibri" pitchFamily="34" charset="-120"/>
+              </a:rPr>
+              <a:t> · gli strumenti di PRG32</a:t>
+            </a:r>
+            <a:endParaRPr lang="en-US" sz="1100" dirty="0"/>
+          </a:p>
+        </p:txBody>
+      </p:sp>
+      <p:sp>
+        <p:nvSpPr>
           <p:cNvPr id="25" name="Slide Number Placeholder 0"/>
           <p:cNvSpPr>
             <a:spLocks noGrp="1"/>
@@ -6704,6 +7741,158 @@
                 <a:cs typeface="Calibri" pitchFamily="34" charset="-120"/>
               </a:rPr>
               <a:t>Schermo nero: confrontate il cablaggio del display con il firmware</a:t>
+            </a:r>
+            <a:endParaRPr lang="en-US" sz="1100" dirty="0"/>
+          </a:p>
+        </p:txBody>
+      </p:sp>
+      <p:sp>
+        <p:nvSpPr>
+          <p:cNvPr id="17" name="Shape 15"/>
+          <p:cNvSpPr/>
+          <p:nvPr/>
+        </p:nvSpPr>
+        <p:spPr>
+          <a:xfrm>
+            <a:off x="7875600" y="91440"/>
+            <a:ext cx="3767455" cy="274320"/>
+          </a:xfrm>
+          <a:prstGeom prst="rect">
+            <a:avLst/>
+          </a:prstGeom>
+          <a:solidFill>
+            <a:srgbClr val="FEF3C7"/>
+          </a:solidFill>
+          <a:ln w="12700">
+            <a:solidFill>
+              <a:srgbClr val="B45309"/>
+            </a:solidFill>
+            <a:prstDash val="solid"/>
+          </a:ln>
+        </p:spPr>
+      </p:sp>
+      <p:sp>
+        <p:nvSpPr>
+          <p:cNvPr id="18" name="Shape 16"/>
+          <p:cNvSpPr/>
+          <p:nvPr/>
+        </p:nvSpPr>
+        <p:spPr>
+          <a:xfrm>
+            <a:off x="7875600" y="91440"/>
+            <a:ext cx="27432" cy="274320"/>
+          </a:xfrm>
+          <a:prstGeom prst="rect">
+            <a:avLst/>
+          </a:prstGeom>
+          <a:solidFill>
+            <a:srgbClr val="B45309"/>
+          </a:solidFill>
+          <a:ln w="12700">
+            <a:solidFill>
+              <a:srgbClr val="B45309"/>
+            </a:solidFill>
+            <a:prstDash val="solid"/>
+          </a:ln>
+        </p:spPr>
+      </p:sp>
+      <p:sp>
+        <p:nvSpPr>
+          <p:cNvPr id="19" name="Shape 17"/>
+          <p:cNvSpPr/>
+          <p:nvPr/>
+        </p:nvSpPr>
+        <p:spPr>
+          <a:xfrm>
+            <a:off x="7930464" y="91440"/>
+            <a:ext cx="27432" cy="274320"/>
+          </a:xfrm>
+          <a:prstGeom prst="rect">
+            <a:avLst/>
+          </a:prstGeom>
+          <a:solidFill>
+            <a:srgbClr val="B45309"/>
+          </a:solidFill>
+          <a:ln w="12700">
+            <a:solidFill>
+              <a:srgbClr val="B45309"/>
+            </a:solidFill>
+            <a:prstDash val="solid"/>
+          </a:ln>
+        </p:spPr>
+      </p:sp>
+      <p:pic>
+        <p:nvPicPr>
+          <p:cNvPr id="20" name="Image 0" descr="preencoded.png">    </p:cNvPr>
+          <p:cNvPicPr>
+            <a:picLocks noChangeAspect="1"/>
+          </p:cNvPicPr>
+          <p:nvPr/>
+        </p:nvPicPr>
+        <p:blipFill>
+          <a:blip r:embed="rId1"/>
+          <a:stretch>
+            <a:fillRect/>
+          </a:stretch>
+        </p:blipFill>
+        <p:spPr>
+          <a:xfrm>
+            <a:off x="8003616" y="128016"/>
+            <a:ext cx="201168" cy="201168"/>
+          </a:xfrm>
+          <a:prstGeom prst="rect">
+            <a:avLst/>
+          </a:prstGeom>
+        </p:spPr>
+      </p:pic>
+      <p:sp>
+        <p:nvSpPr>
+          <p:cNvPr id="21" name="Text 18"/>
+          <p:cNvSpPr txBox="1"/>
+          <p:nvPr/>
+        </p:nvSpPr>
+        <p:spPr>
+          <a:xfrm>
+            <a:off x="8259648" y="91440"/>
+            <a:ext cx="3346831" cy="274320"/>
+          </a:xfrm>
+          <a:prstGeom prst="rect">
+            <a:avLst/>
+          </a:prstGeom>
+          <a:noFill/>
+          <a:ln/>
+        </p:spPr>
+        <p:txBody>
+          <a:bodyPr wrap="square" lIns="0" tIns="0" rIns="0" bIns="0" rtlCol="0" anchor="ctr"/>
+          <a:lstStyle/>
+          <a:p>
+            <a:pPr indent="0" marL="0">
+              <a:buNone/>
+            </a:pPr>
+            <a:r>
+              <a:rPr lang="en-US" sz="1100" b="1" dirty="0">
+                <a:solidFill>
+                  <a:srgbClr val="92400E"/>
+                </a:solidFill>
+                <a:latin typeface="Calibri" pitchFamily="34" charset="0"/>
+                <a:ea typeface="Calibri" pitchFamily="34" charset="-122"/>
+                <a:cs typeface="Calibri" pitchFamily="34" charset="-120"/>
+              </a:rPr>
+              <a:t>DA UTILIZZARE OGGI</a:t>
+            </a:r>
+            <a:pPr indent="0" marL="0">
+              <a:buNone/>
+            </a:pPr>
+            <a:r>
+              <a:rPr lang="en-US" sz="1100" dirty="0">
+                <a:solidFill>
+                  <a:srgbClr val="92400E"/>
+                </a:solidFill>
+                <a:latin typeface="Calibri" pitchFamily="34" charset="0"/>
+                <a:ea typeface="Calibri" pitchFamily="34" charset="-122"/>
+                <a:cs typeface="Calibri" pitchFamily="34" charset="-120"/>
+              </a:rPr>
+              <a:t> · gli strumenti di PRG32</a:t>
             </a:r>
             <a:endParaRPr lang="en-US" sz="1100" dirty="0"/>
           </a:p>
@@ -8092,6 +9281,158 @@
       </p:graphicFrame>
       <p:sp>
         <p:nvSpPr>
+          <p:cNvPr id="4" name="Shape 1"/>
+          <p:cNvSpPr/>
+          <p:nvPr/>
+        </p:nvSpPr>
+        <p:spPr>
+          <a:xfrm>
+            <a:off x="7875600" y="91440"/>
+            <a:ext cx="3767455" cy="274320"/>
+          </a:xfrm>
+          <a:prstGeom prst="rect">
+            <a:avLst/>
+          </a:prstGeom>
+          <a:solidFill>
+            <a:srgbClr val="FEF3C7"/>
+          </a:solidFill>
+          <a:ln w="12700">
+            <a:solidFill>
+              <a:srgbClr val="B45309"/>
+            </a:solidFill>
+            <a:prstDash val="solid"/>
+          </a:ln>
+        </p:spPr>
+      </p:sp>
+      <p:sp>
+        <p:nvSpPr>
+          <p:cNvPr id="5" name="Shape 2"/>
+          <p:cNvSpPr/>
+          <p:nvPr/>
+        </p:nvSpPr>
+        <p:spPr>
+          <a:xfrm>
+            <a:off x="7875600" y="91440"/>
+            <a:ext cx="27432" cy="274320"/>
+          </a:xfrm>
+          <a:prstGeom prst="rect">
+            <a:avLst/>
+          </a:prstGeom>
+          <a:solidFill>
+            <a:srgbClr val="B45309"/>
+          </a:solidFill>
+          <a:ln w="12700">
+            <a:solidFill>
+              <a:srgbClr val="B45309"/>
+            </a:solidFill>
+            <a:prstDash val="solid"/>
+          </a:ln>
+        </p:spPr>
+      </p:sp>
+      <p:sp>
+        <p:nvSpPr>
+          <p:cNvPr id="6" name="Shape 3"/>
+          <p:cNvSpPr/>
+          <p:nvPr/>
+        </p:nvSpPr>
+        <p:spPr>
+          <a:xfrm>
+            <a:off x="7930464" y="91440"/>
+            <a:ext cx="27432" cy="274320"/>
+          </a:xfrm>
+          <a:prstGeom prst="rect">
+            <a:avLst/>
+          </a:prstGeom>
+          <a:solidFill>
+            <a:srgbClr val="B45309"/>
+          </a:solidFill>
+          <a:ln w="12700">
+            <a:solidFill>
+              <a:srgbClr val="B45309"/>
+            </a:solidFill>
+            <a:prstDash val="solid"/>
+          </a:ln>
+        </p:spPr>
+      </p:sp>
+      <p:pic>
+        <p:nvPicPr>
+          <p:cNvPr id="7" name="Image 0" descr="preencoded.png">    </p:cNvPr>
+          <p:cNvPicPr>
+            <a:picLocks noChangeAspect="1"/>
+          </p:cNvPicPr>
+          <p:nvPr/>
+        </p:nvPicPr>
+        <p:blipFill>
+          <a:blip r:embed="rId1"/>
+          <a:stretch>
+            <a:fillRect/>
+          </a:stretch>
+        </p:blipFill>
+        <p:spPr>
+          <a:xfrm>
+            <a:off x="8003616" y="128016"/>
+            <a:ext cx="201168" cy="201168"/>
+          </a:xfrm>
+          <a:prstGeom prst="rect">
+            <a:avLst/>
+          </a:prstGeom>
+        </p:spPr>
+      </p:pic>
+      <p:sp>
+        <p:nvSpPr>
+          <p:cNvPr id="8" name="Text 4"/>
+          <p:cNvSpPr txBox="1"/>
+          <p:nvPr/>
+        </p:nvSpPr>
+        <p:spPr>
+          <a:xfrm>
+            <a:off x="8259648" y="91440"/>
+            <a:ext cx="3346831" cy="274320"/>
+          </a:xfrm>
+          <a:prstGeom prst="rect">
+            <a:avLst/>
+          </a:prstGeom>
+          <a:noFill/>
+          <a:ln/>
+        </p:spPr>
+        <p:txBody>
+          <a:bodyPr wrap="square" lIns="0" tIns="0" rIns="0" bIns="0" rtlCol="0" anchor="ctr"/>
+          <a:lstStyle/>
+          <a:p>
+            <a:pPr indent="0" marL="0">
+              <a:buNone/>
+            </a:pPr>
+            <a:r>
+              <a:rPr lang="en-US" sz="1100" b="1" dirty="0">
+                <a:solidFill>
+                  <a:srgbClr val="92400E"/>
+                </a:solidFill>
+                <a:latin typeface="Calibri" pitchFamily="34" charset="0"/>
+                <a:ea typeface="Calibri" pitchFamily="34" charset="-122"/>
+                <a:cs typeface="Calibri" pitchFamily="34" charset="-120"/>
+              </a:rPr>
+              <a:t>DA UTILIZZARE OGGI</a:t>
+            </a:r>
+            <a:pPr indent="0" marL="0">
+              <a:buNone/>
+            </a:pPr>
+            <a:r>
+              <a:rPr lang="en-US" sz="1100" dirty="0">
+                <a:solidFill>
+                  <a:srgbClr val="92400E"/>
+                </a:solidFill>
+                <a:latin typeface="Calibri" pitchFamily="34" charset="0"/>
+                <a:ea typeface="Calibri" pitchFamily="34" charset="-122"/>
+                <a:cs typeface="Calibri" pitchFamily="34" charset="-120"/>
+              </a:rPr>
+              <a:t> · gli strumenti di PRG32</a:t>
+            </a:r>
+            <a:endParaRPr lang="en-US" sz="1100" dirty="0"/>
+          </a:p>
+        </p:txBody>
+      </p:sp>
+      <p:sp>
+        <p:nvSpPr>
           <p:cNvPr id="25" name="Slide Number Placeholder 0"/>
           <p:cNvSpPr>
             <a:spLocks noGrp="1"/>
@@ -10226,6 +11567,324 @@
               <a:t>L'ESP32-C6 ha hardware che fa esattamente questo, milioni di volte al secondo</a:t>
             </a:r>
             <a:endParaRPr lang="en-US" sz="1200" dirty="0"/>
+          </a:p>
+        </p:txBody>
+      </p:sp>
+      <p:sp>
+        <p:nvSpPr>
+          <p:cNvPr id="17" name="Shape 15"/>
+          <p:cNvSpPr/>
+          <p:nvPr/>
+        </p:nvSpPr>
+        <p:spPr>
+          <a:xfrm>
+            <a:off x="6175451" y="91440"/>
+            <a:ext cx="5467604" cy="274320"/>
+          </a:xfrm>
+          <a:prstGeom prst="rect">
+            <a:avLst/>
+          </a:prstGeom>
+          <a:solidFill>
+            <a:srgbClr val="F3E8FF"/>
+          </a:solidFill>
+          <a:ln w="12700">
+            <a:solidFill>
+              <a:srgbClr val="7E22CE"/>
+            </a:solidFill>
+            <a:prstDash val="dash"/>
+          </a:ln>
+        </p:spPr>
+      </p:sp>
+      <p:sp>
+        <p:nvSpPr>
+          <p:cNvPr id="18" name="Shape 16"/>
+          <p:cNvSpPr/>
+          <p:nvPr/>
+        </p:nvSpPr>
+        <p:spPr>
+          <a:xfrm>
+            <a:off x="6202883" y="128016"/>
+            <a:ext cx="45720" cy="45720"/>
+          </a:xfrm>
+          <a:prstGeom prst="rect">
+            <a:avLst/>
+          </a:prstGeom>
+          <a:solidFill>
+            <a:srgbClr val="7E22CE"/>
+          </a:solidFill>
+          <a:ln w="12700">
+            <a:solidFill>
+              <a:srgbClr val="7E22CE"/>
+            </a:solidFill>
+            <a:prstDash val="solid"/>
+          </a:ln>
+        </p:spPr>
+      </p:sp>
+      <p:sp>
+        <p:nvSpPr>
+          <p:cNvPr id="19" name="Shape 17"/>
+          <p:cNvSpPr/>
+          <p:nvPr/>
+        </p:nvSpPr>
+        <p:spPr>
+          <a:xfrm>
+            <a:off x="6202883" y="205740"/>
+            <a:ext cx="45720" cy="45720"/>
+          </a:xfrm>
+          <a:prstGeom prst="rect">
+            <a:avLst/>
+          </a:prstGeom>
+          <a:solidFill>
+            <a:srgbClr val="7E22CE"/>
+          </a:solidFill>
+          <a:ln w="12700">
+            <a:solidFill>
+              <a:srgbClr val="7E22CE"/>
+            </a:solidFill>
+            <a:prstDash val="solid"/>
+          </a:ln>
+        </p:spPr>
+      </p:sp>
+      <p:sp>
+        <p:nvSpPr>
+          <p:cNvPr id="20" name="Shape 18"/>
+          <p:cNvSpPr/>
+          <p:nvPr/>
+        </p:nvSpPr>
+        <p:spPr>
+          <a:xfrm>
+            <a:off x="6202883" y="283464"/>
+            <a:ext cx="45720" cy="45720"/>
+          </a:xfrm>
+          <a:prstGeom prst="rect">
+            <a:avLst/>
+          </a:prstGeom>
+          <a:solidFill>
+            <a:srgbClr val="7E22CE"/>
+          </a:solidFill>
+          <a:ln w="12700">
+            <a:solidFill>
+              <a:srgbClr val="7E22CE"/>
+            </a:solidFill>
+            <a:prstDash val="solid"/>
+          </a:ln>
+        </p:spPr>
+      </p:sp>
+      <p:pic>
+        <p:nvPicPr>
+          <p:cNvPr id="21" name="Image 0" descr="preencoded.png">    </p:cNvPr>
+          <p:cNvPicPr>
+            <a:picLocks noChangeAspect="1"/>
+          </p:cNvPicPr>
+          <p:nvPr/>
+        </p:nvPicPr>
+        <p:blipFill>
+          <a:blip r:embed="rId1"/>
+          <a:stretch>
+            <a:fillRect/>
+          </a:stretch>
+        </p:blipFill>
+        <p:spPr>
+          <a:xfrm>
+            <a:off x="6303467" y="128016"/>
+            <a:ext cx="201168" cy="201168"/>
+          </a:xfrm>
+          <a:prstGeom prst="rect">
+            <a:avLst/>
+          </a:prstGeom>
+        </p:spPr>
+      </p:pic>
+      <p:sp>
+        <p:nvSpPr>
+          <p:cNvPr id="22" name="Text 19"/>
+          <p:cNvSpPr txBox="1"/>
+          <p:nvPr/>
+        </p:nvSpPr>
+        <p:spPr>
+          <a:xfrm>
+            <a:off x="6559499" y="91440"/>
+            <a:ext cx="5046980" cy="274320"/>
+          </a:xfrm>
+          <a:prstGeom prst="rect">
+            <a:avLst/>
+          </a:prstGeom>
+          <a:noFill/>
+          <a:ln/>
+        </p:spPr>
+        <p:txBody>
+          <a:bodyPr wrap="square" lIns="0" tIns="0" rIns="0" bIns="0" rtlCol="0" anchor="ctr"/>
+          <a:lstStyle/>
+          <a:p>
+            <a:pPr indent="0" marL="0">
+              <a:buNone/>
+            </a:pPr>
+            <a:r>
+              <a:rPr lang="en-US" sz="1100" b="1" dirty="0">
+                <a:solidFill>
+                  <a:srgbClr val="6B21A8"/>
+                </a:solidFill>
+                <a:latin typeface="Calibri" pitchFamily="34" charset="0"/>
+                <a:ea typeface="Calibri" pitchFamily="34" charset="-122"/>
+                <a:cs typeface="Calibri" pitchFamily="34" charset="-120"/>
+              </a:rPr>
+              <a:t>DA COMPRENDERE PIÙ AVANTI</a:t>
+            </a:r>
+            <a:pPr indent="0" marL="0">
+              <a:buNone/>
+            </a:pPr>
+            <a:r>
+              <a:rPr lang="en-US" sz="1100" dirty="0">
+                <a:solidFill>
+                  <a:srgbClr val="6B21A8"/>
+                </a:solidFill>
+                <a:latin typeface="Calibri" pitchFamily="34" charset="0"/>
+                <a:ea typeface="Calibri" pitchFamily="34" charset="-122"/>
+                <a:cs typeface="Calibri" pitchFamily="34" charset="-120"/>
+              </a:rPr>
+              <a:t> · l'I/O mappato in memoria</a:t>
+            </a:r>
+            <a:pPr indent="0" marL="0">
+              <a:buNone/>
+            </a:pPr>
+            <a:r>
+              <a:rPr lang="en-US" sz="1100" b="1" dirty="0">
+                <a:solidFill>
+                  <a:srgbClr val="6B21A8"/>
+                </a:solidFill>
+                <a:latin typeface="Calibri" pitchFamily="34" charset="0"/>
+                <a:ea typeface="Calibri" pitchFamily="34" charset="-122"/>
+                <a:cs typeface="Calibri" pitchFamily="34" charset="-120"/>
+              </a:rPr>
+              <a:t> → Lezione 15</a:t>
+            </a:r>
+            <a:endParaRPr lang="en-US" sz="1100" dirty="0"/>
+          </a:p>
+        </p:txBody>
+      </p:sp>
+      <p:sp>
+        <p:nvSpPr>
+          <p:cNvPr id="23" name="Shape 20"/>
+          <p:cNvSpPr/>
+          <p:nvPr/>
+        </p:nvSpPr>
+        <p:spPr>
+          <a:xfrm>
+            <a:off x="2080336" y="91440"/>
+            <a:ext cx="3985387" cy="274320"/>
+          </a:xfrm>
+          <a:prstGeom prst="rect">
+            <a:avLst/>
+          </a:prstGeom>
+          <a:solidFill>
+            <a:srgbClr val="E0F2FE"/>
+          </a:solidFill>
+          <a:ln w="12700">
+            <a:solidFill>
+              <a:srgbClr val="0369A1"/>
+            </a:solidFill>
+            <a:prstDash val="solid"/>
+          </a:ln>
+        </p:spPr>
+      </p:sp>
+      <p:sp>
+        <p:nvSpPr>
+          <p:cNvPr id="24" name="Shape 21"/>
+          <p:cNvSpPr/>
+          <p:nvPr/>
+        </p:nvSpPr>
+        <p:spPr>
+          <a:xfrm>
+            <a:off x="2080336" y="91440"/>
+            <a:ext cx="73152" cy="274320"/>
+          </a:xfrm>
+          <a:prstGeom prst="rect">
+            <a:avLst/>
+          </a:prstGeom>
+          <a:solidFill>
+            <a:srgbClr val="0369A1"/>
+          </a:solidFill>
+          <a:ln w="12700">
+            <a:solidFill>
+              <a:srgbClr val="0369A1"/>
+            </a:solidFill>
+            <a:prstDash val="solid"/>
+          </a:ln>
+        </p:spPr>
+      </p:sp>
+      <p:pic>
+        <p:nvPicPr>
+          <p:cNvPr id="25" name="Image 1" descr="preencoded.png">    </p:cNvPr>
+          <p:cNvPicPr>
+            <a:picLocks noChangeAspect="1"/>
+          </p:cNvPicPr>
+          <p:nvPr/>
+        </p:nvPicPr>
+        <p:blipFill>
+          <a:blip r:embed="rId2"/>
+          <a:stretch>
+            <a:fillRect/>
+          </a:stretch>
+        </p:blipFill>
+        <p:spPr>
+          <a:xfrm>
+            <a:off x="2208352" y="128016"/>
+            <a:ext cx="201168" cy="201168"/>
+          </a:xfrm>
+          <a:prstGeom prst="rect">
+            <a:avLst/>
+          </a:prstGeom>
+        </p:spPr>
+      </p:pic>
+      <p:sp>
+        <p:nvSpPr>
+          <p:cNvPr id="26" name="Text 22"/>
+          <p:cNvSpPr txBox="1"/>
+          <p:nvPr/>
+        </p:nvSpPr>
+        <p:spPr>
+          <a:xfrm>
+            <a:off x="2464384" y="91440"/>
+            <a:ext cx="3564763" cy="274320"/>
+          </a:xfrm>
+          <a:prstGeom prst="rect">
+            <a:avLst/>
+          </a:prstGeom>
+          <a:noFill/>
+          <a:ln/>
+        </p:spPr>
+        <p:txBody>
+          <a:bodyPr wrap="square" lIns="0" tIns="0" rIns="0" bIns="0" rtlCol="0" anchor="ctr"/>
+          <a:lstStyle/>
+          <a:p>
+            <a:pPr indent="0" marL="0">
+              <a:buNone/>
+            </a:pPr>
+            <a:r>
+              <a:rPr lang="en-US" sz="1100" b="1" dirty="0">
+                <a:solidFill>
+                  <a:srgbClr val="075985"/>
+                </a:solidFill>
+                <a:latin typeface="Calibri" pitchFamily="34" charset="0"/>
+                <a:ea typeface="Calibri" pitchFamily="34" charset="-122"/>
+                <a:cs typeface="Calibri" pitchFamily="34" charset="-120"/>
+              </a:rPr>
+              <a:t>DA COMPRENDERE OGGI</a:t>
+            </a:r>
+            <a:pPr indent="0" marL="0">
+              <a:buNone/>
+            </a:pPr>
+            <a:r>
+              <a:rPr lang="en-US" sz="1100" dirty="0">
+                <a:solidFill>
+                  <a:srgbClr val="075985"/>
+                </a:solidFill>
+                <a:latin typeface="Calibri" pitchFamily="34" charset="0"/>
+                <a:ea typeface="Calibri" pitchFamily="34" charset="-122"/>
+                <a:cs typeface="Calibri" pitchFamily="34" charset="-120"/>
+              </a:rPr>
+              <a:t> · i registri a scorrimento</a:t>
+            </a:r>
+            <a:endParaRPr lang="en-US" sz="1100" dirty="0"/>
           </a:p>
         </p:txBody>
       </p:sp>
@@ -12021,6 +13680,133 @@
       </p:graphicFrame>
       <p:sp>
         <p:nvSpPr>
+          <p:cNvPr id="4" name="Shape 1"/>
+          <p:cNvSpPr/>
+          <p:nvPr/>
+        </p:nvSpPr>
+        <p:spPr>
+          <a:xfrm>
+            <a:off x="7723327" y="91440"/>
+            <a:ext cx="3919728" cy="274320"/>
+          </a:xfrm>
+          <a:prstGeom prst="rect">
+            <a:avLst/>
+          </a:prstGeom>
+          <a:solidFill>
+            <a:srgbClr val="E0F2FE"/>
+          </a:solidFill>
+          <a:ln w="12700">
+            <a:solidFill>
+              <a:srgbClr val="0369A1"/>
+            </a:solidFill>
+            <a:prstDash val="solid"/>
+          </a:ln>
+        </p:spPr>
+      </p:sp>
+      <p:sp>
+        <p:nvSpPr>
+          <p:cNvPr id="5" name="Shape 2"/>
+          <p:cNvSpPr/>
+          <p:nvPr/>
+        </p:nvSpPr>
+        <p:spPr>
+          <a:xfrm>
+            <a:off x="7723327" y="91440"/>
+            <a:ext cx="73152" cy="274320"/>
+          </a:xfrm>
+          <a:prstGeom prst="rect">
+            <a:avLst/>
+          </a:prstGeom>
+          <a:solidFill>
+            <a:srgbClr val="0369A1"/>
+          </a:solidFill>
+          <a:ln w="12700">
+            <a:solidFill>
+              <a:srgbClr val="0369A1"/>
+            </a:solidFill>
+            <a:prstDash val="solid"/>
+          </a:ln>
+        </p:spPr>
+      </p:sp>
+      <p:pic>
+        <p:nvPicPr>
+          <p:cNvPr id="6" name="Image 0" descr="preencoded.png">    </p:cNvPr>
+          <p:cNvPicPr>
+            <a:picLocks noChangeAspect="1"/>
+          </p:cNvPicPr>
+          <p:nvPr/>
+        </p:nvPicPr>
+        <p:blipFill>
+          <a:blip r:embed="rId1"/>
+          <a:stretch>
+            <a:fillRect/>
+          </a:stretch>
+        </p:blipFill>
+        <p:spPr>
+          <a:xfrm>
+            <a:off x="7851343" y="128016"/>
+            <a:ext cx="201168" cy="201168"/>
+          </a:xfrm>
+          <a:prstGeom prst="rect">
+            <a:avLst/>
+          </a:prstGeom>
+        </p:spPr>
+      </p:pic>
+      <p:sp>
+        <p:nvSpPr>
+          <p:cNvPr id="7" name="Text 3"/>
+          <p:cNvSpPr txBox="1"/>
+          <p:nvPr/>
+        </p:nvSpPr>
+        <p:spPr>
+          <a:xfrm>
+            <a:off x="8107375" y="91440"/>
+            <a:ext cx="3499104" cy="274320"/>
+          </a:xfrm>
+          <a:prstGeom prst="rect">
+            <a:avLst/>
+          </a:prstGeom>
+          <a:noFill/>
+          <a:ln/>
+        </p:spPr>
+        <p:txBody>
+          <a:bodyPr wrap="square" lIns="0" tIns="0" rIns="0" bIns="0" rtlCol="0" anchor="ctr"/>
+          <a:lstStyle/>
+          <a:p>
+            <a:pPr indent="0" marL="0">
+              <a:buNone/>
+            </a:pPr>
+            <a:r>
+              <a:rPr lang="en-US" sz="1100" b="1" dirty="0">
+                <a:solidFill>
+                  <a:srgbClr val="075985"/>
+                </a:solidFill>
+                <a:latin typeface="Calibri" pitchFamily="34" charset="0"/>
+                <a:ea typeface="Calibri" pitchFamily="34" charset="-122"/>
+                <a:cs typeface="Calibri" pitchFamily="34" charset="-120"/>
+              </a:rPr>
+              <a:t>DA COMPRENDERE OGGI</a:t>
+            </a:r>
+            <a:pPr indent="0" marL="0">
+              <a:buNone/>
+            </a:pPr>
+            <a:r>
+              <a:rPr lang="en-US" sz="1100" dirty="0">
+                <a:solidFill>
+                  <a:srgbClr val="075985"/>
+                </a:solidFill>
+                <a:latin typeface="Calibri" pitchFamily="34" charset="0"/>
+                <a:ea typeface="Calibri" pitchFamily="34" charset="-122"/>
+                <a:cs typeface="Calibri" pitchFamily="34" charset="-120"/>
+              </a:rPr>
+              <a:t> · bus e porte three-state</a:t>
+            </a:r>
+            <a:endParaRPr lang="en-US" sz="1100" dirty="0"/>
+          </a:p>
+        </p:txBody>
+      </p:sp>
+      <p:sp>
+        <p:nvSpPr>
           <p:cNvPr id="25" name="Slide Number Placeholder 0"/>
           <p:cNvSpPr>
             <a:spLocks noGrp="1"/>
@@ -12694,6 +14480,133 @@
       </p:sp>
       <p:sp>
         <p:nvSpPr>
+          <p:cNvPr id="15" name="Shape 13"/>
+          <p:cNvSpPr/>
+          <p:nvPr/>
+        </p:nvSpPr>
+        <p:spPr>
+          <a:xfrm>
+            <a:off x="7657668" y="91440"/>
+            <a:ext cx="3985387" cy="274320"/>
+          </a:xfrm>
+          <a:prstGeom prst="rect">
+            <a:avLst/>
+          </a:prstGeom>
+          <a:solidFill>
+            <a:srgbClr val="E0F2FE"/>
+          </a:solidFill>
+          <a:ln w="12700">
+            <a:solidFill>
+              <a:srgbClr val="0369A1"/>
+            </a:solidFill>
+            <a:prstDash val="solid"/>
+          </a:ln>
+        </p:spPr>
+      </p:sp>
+      <p:sp>
+        <p:nvSpPr>
+          <p:cNvPr id="16" name="Shape 14"/>
+          <p:cNvSpPr/>
+          <p:nvPr/>
+        </p:nvSpPr>
+        <p:spPr>
+          <a:xfrm>
+            <a:off x="7657668" y="91440"/>
+            <a:ext cx="73152" cy="274320"/>
+          </a:xfrm>
+          <a:prstGeom prst="rect">
+            <a:avLst/>
+          </a:prstGeom>
+          <a:solidFill>
+            <a:srgbClr val="0369A1"/>
+          </a:solidFill>
+          <a:ln w="12700">
+            <a:solidFill>
+              <a:srgbClr val="0369A1"/>
+            </a:solidFill>
+            <a:prstDash val="solid"/>
+          </a:ln>
+        </p:spPr>
+      </p:sp>
+      <p:pic>
+        <p:nvPicPr>
+          <p:cNvPr id="17" name="Image 0" descr="preencoded.png">    </p:cNvPr>
+          <p:cNvPicPr>
+            <a:picLocks noChangeAspect="1"/>
+          </p:cNvPicPr>
+          <p:nvPr/>
+        </p:nvPicPr>
+        <p:blipFill>
+          <a:blip r:embed="rId1"/>
+          <a:stretch>
+            <a:fillRect/>
+          </a:stretch>
+        </p:blipFill>
+        <p:spPr>
+          <a:xfrm>
+            <a:off x="7785684" y="128016"/>
+            <a:ext cx="201168" cy="201168"/>
+          </a:xfrm>
+          <a:prstGeom prst="rect">
+            <a:avLst/>
+          </a:prstGeom>
+        </p:spPr>
+      </p:pic>
+      <p:sp>
+        <p:nvSpPr>
+          <p:cNvPr id="18" name="Text 15"/>
+          <p:cNvSpPr txBox="1"/>
+          <p:nvPr/>
+        </p:nvSpPr>
+        <p:spPr>
+          <a:xfrm>
+            <a:off x="8041716" y="91440"/>
+            <a:ext cx="3564763" cy="274320"/>
+          </a:xfrm>
+          <a:prstGeom prst="rect">
+            <a:avLst/>
+          </a:prstGeom>
+          <a:noFill/>
+          <a:ln/>
+        </p:spPr>
+        <p:txBody>
+          <a:bodyPr wrap="square" lIns="0" tIns="0" rIns="0" bIns="0" rtlCol="0" anchor="ctr"/>
+          <a:lstStyle/>
+          <a:p>
+            <a:pPr indent="0" marL="0">
+              <a:buNone/>
+            </a:pPr>
+            <a:r>
+              <a:rPr lang="en-US" sz="1100" b="1" dirty="0">
+                <a:solidFill>
+                  <a:srgbClr val="075985"/>
+                </a:solidFill>
+                <a:latin typeface="Calibri" pitchFamily="34" charset="0"/>
+                <a:ea typeface="Calibri" pitchFamily="34" charset="-122"/>
+                <a:cs typeface="Calibri" pitchFamily="34" charset="-120"/>
+              </a:rPr>
+              <a:t>DA COMPRENDERE OGGI</a:t>
+            </a:r>
+            <a:pPr indent="0" marL="0">
+              <a:buNone/>
+            </a:pPr>
+            <a:r>
+              <a:rPr lang="en-US" sz="1100" dirty="0">
+                <a:solidFill>
+                  <a:srgbClr val="075985"/>
+                </a:solidFill>
+                <a:latin typeface="Calibri" pitchFamily="34" charset="0"/>
+                <a:ea typeface="Calibri" pitchFamily="34" charset="-122"/>
+                <a:cs typeface="Calibri" pitchFamily="34" charset="-120"/>
+              </a:rPr>
+              <a:t> · i registri a scorrimento</a:t>
+            </a:r>
+            <a:endParaRPr lang="en-US" sz="1100" dirty="0"/>
+          </a:p>
+        </p:txBody>
+      </p:sp>
+      <p:sp>
+        <p:nvSpPr>
           <p:cNvPr id="25" name="Slide Number Placeholder 0"/>
           <p:cNvSpPr>
             <a:spLocks noGrp="1"/>
@@ -13228,6 +15141,158 @@
       </p:sp>
       <p:sp>
         <p:nvSpPr>
+          <p:cNvPr id="5" name="Shape 3"/>
+          <p:cNvSpPr/>
+          <p:nvPr/>
+        </p:nvSpPr>
+        <p:spPr>
+          <a:xfrm>
+            <a:off x="7941259" y="91440"/>
+            <a:ext cx="3701796" cy="274320"/>
+          </a:xfrm>
+          <a:prstGeom prst="rect">
+            <a:avLst/>
+          </a:prstGeom>
+          <a:solidFill>
+            <a:srgbClr val="FEF3C7"/>
+          </a:solidFill>
+          <a:ln w="12700">
+            <a:solidFill>
+              <a:srgbClr val="B45309"/>
+            </a:solidFill>
+            <a:prstDash val="solid"/>
+          </a:ln>
+        </p:spPr>
+      </p:sp>
+      <p:sp>
+        <p:nvSpPr>
+          <p:cNvPr id="6" name="Shape 4"/>
+          <p:cNvSpPr/>
+          <p:nvPr/>
+        </p:nvSpPr>
+        <p:spPr>
+          <a:xfrm>
+            <a:off x="7941259" y="91440"/>
+            <a:ext cx="27432" cy="274320"/>
+          </a:xfrm>
+          <a:prstGeom prst="rect">
+            <a:avLst/>
+          </a:prstGeom>
+          <a:solidFill>
+            <a:srgbClr val="B45309"/>
+          </a:solidFill>
+          <a:ln w="12700">
+            <a:solidFill>
+              <a:srgbClr val="B45309"/>
+            </a:solidFill>
+            <a:prstDash val="solid"/>
+          </a:ln>
+        </p:spPr>
+      </p:sp>
+      <p:sp>
+        <p:nvSpPr>
+          <p:cNvPr id="7" name="Shape 5"/>
+          <p:cNvSpPr/>
+          <p:nvPr/>
+        </p:nvSpPr>
+        <p:spPr>
+          <a:xfrm>
+            <a:off x="7996123" y="91440"/>
+            <a:ext cx="27432" cy="274320"/>
+          </a:xfrm>
+          <a:prstGeom prst="rect">
+            <a:avLst/>
+          </a:prstGeom>
+          <a:solidFill>
+            <a:srgbClr val="B45309"/>
+          </a:solidFill>
+          <a:ln w="12700">
+            <a:solidFill>
+              <a:srgbClr val="B45309"/>
+            </a:solidFill>
+            <a:prstDash val="solid"/>
+          </a:ln>
+        </p:spPr>
+      </p:sp>
+      <p:pic>
+        <p:nvPicPr>
+          <p:cNvPr id="8" name="Image 0" descr="preencoded.png">    </p:cNvPr>
+          <p:cNvPicPr>
+            <a:picLocks noChangeAspect="1"/>
+          </p:cNvPicPr>
+          <p:nvPr/>
+        </p:nvPicPr>
+        <p:blipFill>
+          <a:blip r:embed="rId1"/>
+          <a:stretch>
+            <a:fillRect/>
+          </a:stretch>
+        </p:blipFill>
+        <p:spPr>
+          <a:xfrm>
+            <a:off x="8069275" y="128016"/>
+            <a:ext cx="201168" cy="201168"/>
+          </a:xfrm>
+          <a:prstGeom prst="rect">
+            <a:avLst/>
+          </a:prstGeom>
+        </p:spPr>
+      </p:pic>
+      <p:sp>
+        <p:nvSpPr>
+          <p:cNvPr id="9" name="Text 6"/>
+          <p:cNvSpPr txBox="1"/>
+          <p:nvPr/>
+        </p:nvSpPr>
+        <p:spPr>
+          <a:xfrm>
+            <a:off x="8325307" y="91440"/>
+            <a:ext cx="3281172" cy="274320"/>
+          </a:xfrm>
+          <a:prstGeom prst="rect">
+            <a:avLst/>
+          </a:prstGeom>
+          <a:noFill/>
+          <a:ln/>
+        </p:spPr>
+        <p:txBody>
+          <a:bodyPr wrap="square" lIns="0" tIns="0" rIns="0" bIns="0" rtlCol="0" anchor="ctr"/>
+          <a:lstStyle/>
+          <a:p>
+            <a:pPr indent="0" marL="0">
+              <a:buNone/>
+            </a:pPr>
+            <a:r>
+              <a:rPr lang="en-US" sz="1100" b="1" dirty="0">
+                <a:solidFill>
+                  <a:srgbClr val="92400E"/>
+                </a:solidFill>
+                <a:latin typeface="Calibri" pitchFamily="34" charset="0"/>
+                <a:ea typeface="Calibri" pitchFamily="34" charset="-122"/>
+                <a:cs typeface="Calibri" pitchFamily="34" charset="-120"/>
+              </a:rPr>
+              <a:t>DA UTILIZZARE OGGI</a:t>
+            </a:r>
+            <a:pPr indent="0" marL="0">
+              <a:buNone/>
+            </a:pPr>
+            <a:r>
+              <a:rPr lang="en-US" sz="1100" dirty="0">
+                <a:solidFill>
+                  <a:srgbClr val="92400E"/>
+                </a:solidFill>
+                <a:latin typeface="Calibri" pitchFamily="34" charset="0"/>
+                <a:ea typeface="Calibri" pitchFamily="34" charset="-122"/>
+                <a:cs typeface="Calibri" pitchFamily="34" charset="-120"/>
+              </a:rPr>
+              <a:t> · il programma completo</a:t>
+            </a:r>
+            <a:endParaRPr lang="en-US" sz="1100" dirty="0"/>
+          </a:p>
+        </p:txBody>
+      </p:sp>
+      <p:sp>
+        <p:nvSpPr>
           <p:cNvPr id="25" name="Slide Number Placeholder 0"/>
           <p:cNvSpPr>
             <a:spLocks noGrp="1"/>
@@ -13677,6 +15742,158 @@
       </p:sp>
       <p:sp>
         <p:nvSpPr>
+          <p:cNvPr id="5" name="Shape 3"/>
+          <p:cNvSpPr/>
+          <p:nvPr/>
+        </p:nvSpPr>
+        <p:spPr>
+          <a:xfrm>
+            <a:off x="7941259" y="91440"/>
+            <a:ext cx="3701796" cy="274320"/>
+          </a:xfrm>
+          <a:prstGeom prst="rect">
+            <a:avLst/>
+          </a:prstGeom>
+          <a:solidFill>
+            <a:srgbClr val="FEF3C7"/>
+          </a:solidFill>
+          <a:ln w="12700">
+            <a:solidFill>
+              <a:srgbClr val="B45309"/>
+            </a:solidFill>
+            <a:prstDash val="solid"/>
+          </a:ln>
+        </p:spPr>
+      </p:sp>
+      <p:sp>
+        <p:nvSpPr>
+          <p:cNvPr id="6" name="Shape 4"/>
+          <p:cNvSpPr/>
+          <p:nvPr/>
+        </p:nvSpPr>
+        <p:spPr>
+          <a:xfrm>
+            <a:off x="7941259" y="91440"/>
+            <a:ext cx="27432" cy="274320"/>
+          </a:xfrm>
+          <a:prstGeom prst="rect">
+            <a:avLst/>
+          </a:prstGeom>
+          <a:solidFill>
+            <a:srgbClr val="B45309"/>
+          </a:solidFill>
+          <a:ln w="12700">
+            <a:solidFill>
+              <a:srgbClr val="B45309"/>
+            </a:solidFill>
+            <a:prstDash val="solid"/>
+          </a:ln>
+        </p:spPr>
+      </p:sp>
+      <p:sp>
+        <p:nvSpPr>
+          <p:cNvPr id="7" name="Shape 5"/>
+          <p:cNvSpPr/>
+          <p:nvPr/>
+        </p:nvSpPr>
+        <p:spPr>
+          <a:xfrm>
+            <a:off x="7996123" y="91440"/>
+            <a:ext cx="27432" cy="274320"/>
+          </a:xfrm>
+          <a:prstGeom prst="rect">
+            <a:avLst/>
+          </a:prstGeom>
+          <a:solidFill>
+            <a:srgbClr val="B45309"/>
+          </a:solidFill>
+          <a:ln w="12700">
+            <a:solidFill>
+              <a:srgbClr val="B45309"/>
+            </a:solidFill>
+            <a:prstDash val="solid"/>
+          </a:ln>
+        </p:spPr>
+      </p:sp>
+      <p:pic>
+        <p:nvPicPr>
+          <p:cNvPr id="8" name="Image 0" descr="preencoded.png">    </p:cNvPr>
+          <p:cNvPicPr>
+            <a:picLocks noChangeAspect="1"/>
+          </p:cNvPicPr>
+          <p:nvPr/>
+        </p:nvPicPr>
+        <p:blipFill>
+          <a:blip r:embed="rId1"/>
+          <a:stretch>
+            <a:fillRect/>
+          </a:stretch>
+        </p:blipFill>
+        <p:spPr>
+          <a:xfrm>
+            <a:off x="8069275" y="128016"/>
+            <a:ext cx="201168" cy="201168"/>
+          </a:xfrm>
+          <a:prstGeom prst="rect">
+            <a:avLst/>
+          </a:prstGeom>
+        </p:spPr>
+      </p:pic>
+      <p:sp>
+        <p:nvSpPr>
+          <p:cNvPr id="9" name="Text 6"/>
+          <p:cNvSpPr txBox="1"/>
+          <p:nvPr/>
+        </p:nvSpPr>
+        <p:spPr>
+          <a:xfrm>
+            <a:off x="8325307" y="91440"/>
+            <a:ext cx="3281172" cy="274320"/>
+          </a:xfrm>
+          <a:prstGeom prst="rect">
+            <a:avLst/>
+          </a:prstGeom>
+          <a:noFill/>
+          <a:ln/>
+        </p:spPr>
+        <p:txBody>
+          <a:bodyPr wrap="square" lIns="0" tIns="0" rIns="0" bIns="0" rtlCol="0" anchor="ctr"/>
+          <a:lstStyle/>
+          <a:p>
+            <a:pPr indent="0" marL="0">
+              <a:buNone/>
+            </a:pPr>
+            <a:r>
+              <a:rPr lang="en-US" sz="1100" b="1" dirty="0">
+                <a:solidFill>
+                  <a:srgbClr val="92400E"/>
+                </a:solidFill>
+                <a:latin typeface="Calibri" pitchFamily="34" charset="0"/>
+                <a:ea typeface="Calibri" pitchFamily="34" charset="-122"/>
+                <a:cs typeface="Calibri" pitchFamily="34" charset="-120"/>
+              </a:rPr>
+              <a:t>DA UTILIZZARE OGGI</a:t>
+            </a:r>
+            <a:pPr indent="0" marL="0">
+              <a:buNone/>
+            </a:pPr>
+            <a:r>
+              <a:rPr lang="en-US" sz="1100" dirty="0">
+                <a:solidFill>
+                  <a:srgbClr val="92400E"/>
+                </a:solidFill>
+                <a:latin typeface="Calibri" pitchFamily="34" charset="0"/>
+                <a:ea typeface="Calibri" pitchFamily="34" charset="-122"/>
+                <a:cs typeface="Calibri" pitchFamily="34" charset="-120"/>
+              </a:rPr>
+              <a:t> · il programma completo</a:t>
+            </a:r>
+            <a:endParaRPr lang="en-US" sz="1100" dirty="0"/>
+          </a:p>
+        </p:txBody>
+      </p:sp>
+      <p:sp>
+        <p:nvSpPr>
           <p:cNvPr id="25" name="Slide Number Placeholder 0"/>
           <p:cNvSpPr>
             <a:spLocks noGrp="1"/>
@@ -13993,6 +16210,158 @@
       </p:sp>
       <p:sp>
         <p:nvSpPr>
+          <p:cNvPr id="5" name="Shape 3"/>
+          <p:cNvSpPr/>
+          <p:nvPr/>
+        </p:nvSpPr>
+        <p:spPr>
+          <a:xfrm>
+            <a:off x="7941259" y="91440"/>
+            <a:ext cx="3701796" cy="274320"/>
+          </a:xfrm>
+          <a:prstGeom prst="rect">
+            <a:avLst/>
+          </a:prstGeom>
+          <a:solidFill>
+            <a:srgbClr val="FEF3C7"/>
+          </a:solidFill>
+          <a:ln w="12700">
+            <a:solidFill>
+              <a:srgbClr val="B45309"/>
+            </a:solidFill>
+            <a:prstDash val="solid"/>
+          </a:ln>
+        </p:spPr>
+      </p:sp>
+      <p:sp>
+        <p:nvSpPr>
+          <p:cNvPr id="6" name="Shape 4"/>
+          <p:cNvSpPr/>
+          <p:nvPr/>
+        </p:nvSpPr>
+        <p:spPr>
+          <a:xfrm>
+            <a:off x="7941259" y="91440"/>
+            <a:ext cx="27432" cy="274320"/>
+          </a:xfrm>
+          <a:prstGeom prst="rect">
+            <a:avLst/>
+          </a:prstGeom>
+          <a:solidFill>
+            <a:srgbClr val="B45309"/>
+          </a:solidFill>
+          <a:ln w="12700">
+            <a:solidFill>
+              <a:srgbClr val="B45309"/>
+            </a:solidFill>
+            <a:prstDash val="solid"/>
+          </a:ln>
+        </p:spPr>
+      </p:sp>
+      <p:sp>
+        <p:nvSpPr>
+          <p:cNvPr id="7" name="Shape 5"/>
+          <p:cNvSpPr/>
+          <p:nvPr/>
+        </p:nvSpPr>
+        <p:spPr>
+          <a:xfrm>
+            <a:off x="7996123" y="91440"/>
+            <a:ext cx="27432" cy="274320"/>
+          </a:xfrm>
+          <a:prstGeom prst="rect">
+            <a:avLst/>
+          </a:prstGeom>
+          <a:solidFill>
+            <a:srgbClr val="B45309"/>
+          </a:solidFill>
+          <a:ln w="12700">
+            <a:solidFill>
+              <a:srgbClr val="B45309"/>
+            </a:solidFill>
+            <a:prstDash val="solid"/>
+          </a:ln>
+        </p:spPr>
+      </p:sp>
+      <p:pic>
+        <p:nvPicPr>
+          <p:cNvPr id="8" name="Image 0" descr="preencoded.png">    </p:cNvPr>
+          <p:cNvPicPr>
+            <a:picLocks noChangeAspect="1"/>
+          </p:cNvPicPr>
+          <p:nvPr/>
+        </p:nvPicPr>
+        <p:blipFill>
+          <a:blip r:embed="rId1"/>
+          <a:stretch>
+            <a:fillRect/>
+          </a:stretch>
+        </p:blipFill>
+        <p:spPr>
+          <a:xfrm>
+            <a:off x="8069275" y="128016"/>
+            <a:ext cx="201168" cy="201168"/>
+          </a:xfrm>
+          <a:prstGeom prst="rect">
+            <a:avLst/>
+          </a:prstGeom>
+        </p:spPr>
+      </p:pic>
+      <p:sp>
+        <p:nvSpPr>
+          <p:cNvPr id="9" name="Text 6"/>
+          <p:cNvSpPr txBox="1"/>
+          <p:nvPr/>
+        </p:nvSpPr>
+        <p:spPr>
+          <a:xfrm>
+            <a:off x="8325307" y="91440"/>
+            <a:ext cx="3281172" cy="274320"/>
+          </a:xfrm>
+          <a:prstGeom prst="rect">
+            <a:avLst/>
+          </a:prstGeom>
+          <a:noFill/>
+          <a:ln/>
+        </p:spPr>
+        <p:txBody>
+          <a:bodyPr wrap="square" lIns="0" tIns="0" rIns="0" bIns="0" rtlCol="0" anchor="ctr"/>
+          <a:lstStyle/>
+          <a:p>
+            <a:pPr indent="0" marL="0">
+              <a:buNone/>
+            </a:pPr>
+            <a:r>
+              <a:rPr lang="en-US" sz="1100" b="1" dirty="0">
+                <a:solidFill>
+                  <a:srgbClr val="92400E"/>
+                </a:solidFill>
+                <a:latin typeface="Calibri" pitchFamily="34" charset="0"/>
+                <a:ea typeface="Calibri" pitchFamily="34" charset="-122"/>
+                <a:cs typeface="Calibri" pitchFamily="34" charset="-120"/>
+              </a:rPr>
+              <a:t>DA UTILIZZARE OGGI</a:t>
+            </a:r>
+            <a:pPr indent="0" marL="0">
+              <a:buNone/>
+            </a:pPr>
+            <a:r>
+              <a:rPr lang="en-US" sz="1100" dirty="0">
+                <a:solidFill>
+                  <a:srgbClr val="92400E"/>
+                </a:solidFill>
+                <a:latin typeface="Calibri" pitchFamily="34" charset="0"/>
+                <a:ea typeface="Calibri" pitchFamily="34" charset="-122"/>
+                <a:cs typeface="Calibri" pitchFamily="34" charset="-120"/>
+              </a:rPr>
+              <a:t> · il programma completo</a:t>
+            </a:r>
+            <a:endParaRPr lang="en-US" sz="1100" dirty="0"/>
+          </a:p>
+        </p:txBody>
+      </p:sp>
+      <p:sp>
+        <p:nvSpPr>
           <p:cNvPr id="25" name="Slide Number Placeholder 0"/>
           <p:cNvSpPr>
             <a:spLocks noGrp="1"/>
@@ -14591,6 +16960,158 @@
               <a:t>    blt  s2, t0, 1b</a:t>
             </a:r>
             <a:endParaRPr lang="en-US" sz="1800" dirty="0"/>
+          </a:p>
+        </p:txBody>
+      </p:sp>
+      <p:sp>
+        <p:nvSpPr>
+          <p:cNvPr id="5" name="Shape 3"/>
+          <p:cNvSpPr/>
+          <p:nvPr/>
+        </p:nvSpPr>
+        <p:spPr>
+          <a:xfrm>
+            <a:off x="7941259" y="91440"/>
+            <a:ext cx="3701796" cy="274320"/>
+          </a:xfrm>
+          <a:prstGeom prst="rect">
+            <a:avLst/>
+          </a:prstGeom>
+          <a:solidFill>
+            <a:srgbClr val="FEF3C7"/>
+          </a:solidFill>
+          <a:ln w="12700">
+            <a:solidFill>
+              <a:srgbClr val="B45309"/>
+            </a:solidFill>
+            <a:prstDash val="solid"/>
+          </a:ln>
+        </p:spPr>
+      </p:sp>
+      <p:sp>
+        <p:nvSpPr>
+          <p:cNvPr id="6" name="Shape 4"/>
+          <p:cNvSpPr/>
+          <p:nvPr/>
+        </p:nvSpPr>
+        <p:spPr>
+          <a:xfrm>
+            <a:off x="7941259" y="91440"/>
+            <a:ext cx="27432" cy="274320"/>
+          </a:xfrm>
+          <a:prstGeom prst="rect">
+            <a:avLst/>
+          </a:prstGeom>
+          <a:solidFill>
+            <a:srgbClr val="B45309"/>
+          </a:solidFill>
+          <a:ln w="12700">
+            <a:solidFill>
+              <a:srgbClr val="B45309"/>
+            </a:solidFill>
+            <a:prstDash val="solid"/>
+          </a:ln>
+        </p:spPr>
+      </p:sp>
+      <p:sp>
+        <p:nvSpPr>
+          <p:cNvPr id="7" name="Shape 5"/>
+          <p:cNvSpPr/>
+          <p:nvPr/>
+        </p:nvSpPr>
+        <p:spPr>
+          <a:xfrm>
+            <a:off x="7996123" y="91440"/>
+            <a:ext cx="27432" cy="274320"/>
+          </a:xfrm>
+          <a:prstGeom prst="rect">
+            <a:avLst/>
+          </a:prstGeom>
+          <a:solidFill>
+            <a:srgbClr val="B45309"/>
+          </a:solidFill>
+          <a:ln w="12700">
+            <a:solidFill>
+              <a:srgbClr val="B45309"/>
+            </a:solidFill>
+            <a:prstDash val="solid"/>
+          </a:ln>
+        </p:spPr>
+      </p:sp>
+      <p:pic>
+        <p:nvPicPr>
+          <p:cNvPr id="8" name="Image 0" descr="preencoded.png">    </p:cNvPr>
+          <p:cNvPicPr>
+            <a:picLocks noChangeAspect="1"/>
+          </p:cNvPicPr>
+          <p:nvPr/>
+        </p:nvPicPr>
+        <p:blipFill>
+          <a:blip r:embed="rId1"/>
+          <a:stretch>
+            <a:fillRect/>
+          </a:stretch>
+        </p:blipFill>
+        <p:spPr>
+          <a:xfrm>
+            <a:off x="8069275" y="128016"/>
+            <a:ext cx="201168" cy="201168"/>
+          </a:xfrm>
+          <a:prstGeom prst="rect">
+            <a:avLst/>
+          </a:prstGeom>
+        </p:spPr>
+      </p:pic>
+      <p:sp>
+        <p:nvSpPr>
+          <p:cNvPr id="9" name="Text 6"/>
+          <p:cNvSpPr txBox="1"/>
+          <p:nvPr/>
+        </p:nvSpPr>
+        <p:spPr>
+          <a:xfrm>
+            <a:off x="8325307" y="91440"/>
+            <a:ext cx="3281172" cy="274320"/>
+          </a:xfrm>
+          <a:prstGeom prst="rect">
+            <a:avLst/>
+          </a:prstGeom>
+          <a:noFill/>
+          <a:ln/>
+        </p:spPr>
+        <p:txBody>
+          <a:bodyPr wrap="square" lIns="0" tIns="0" rIns="0" bIns="0" rtlCol="0" anchor="ctr"/>
+          <a:lstStyle/>
+          <a:p>
+            <a:pPr indent="0" marL="0">
+              <a:buNone/>
+            </a:pPr>
+            <a:r>
+              <a:rPr lang="en-US" sz="1100" b="1" dirty="0">
+                <a:solidFill>
+                  <a:srgbClr val="92400E"/>
+                </a:solidFill>
+                <a:latin typeface="Calibri" pitchFamily="34" charset="0"/>
+                <a:ea typeface="Calibri" pitchFamily="34" charset="-122"/>
+                <a:cs typeface="Calibri" pitchFamily="34" charset="-120"/>
+              </a:rPr>
+              <a:t>DA UTILIZZARE OGGI</a:t>
+            </a:r>
+            <a:pPr indent="0" marL="0">
+              <a:buNone/>
+            </a:pPr>
+            <a:r>
+              <a:rPr lang="en-US" sz="1100" dirty="0">
+                <a:solidFill>
+                  <a:srgbClr val="92400E"/>
+                </a:solidFill>
+                <a:latin typeface="Calibri" pitchFamily="34" charset="0"/>
+                <a:ea typeface="Calibri" pitchFamily="34" charset="-122"/>
+                <a:cs typeface="Calibri" pitchFamily="34" charset="-120"/>
+              </a:rPr>
+              <a:t> · il programma completo</a:t>
+            </a:r>
+            <a:endParaRPr lang="en-US" sz="1100" dirty="0"/>
           </a:p>
         </p:txBody>
       </p:sp>

--- a/it/slides/14-Architettura_dei_Calcolatori-Registri_e_Bus-Codice.pptx
+++ b/it/slides/14-Architettura_dei_Calcolatori-Registri_e_Bus-Codice.pptx
@@ -123,24 +123,24 @@
   <p:extLst>
     <p:ext uri="{521415D9-36F7-43E2-AB2F-B90AF26B5E84}">
       <p14:sectionLst xmlns:p14="http://schemas.microsoft.com/office/powerpoint/2010/main">
-        <p14:section name="Apertura" id="{2f5d9dbc-7d04-8203-8b26-e9e2c96c0dab}">
+        <p14:section name="Apertura" id="{56a421b3-0c36-d458-9d8b-62b5f2a270eb}">
           <p14:sldIdLst>
             <p14:sldId id="256"/>
             <p14:sldId id="257"/>
           </p14:sldIdLst>
         </p14:section>
-        <p14:section name="Riscaldamento sulla macchina" id="{279ed533-95df-5e0e-f525-5e6c71c46e37}">
+        <p14:section name="Riscaldamento sulla macchina" id="{cde7969a-584f-a29c-58e6-ebe313b2f44f}">
           <p14:sldIdLst>
             <p14:sldId id="258"/>
           </p14:sldIdLst>
         </p14:section>
-        <p14:section name="Ritorno alla macchina" id="{5780f0d8-35b9-38c1-c497-a47d99229536}">
+        <p14:section name="Ritorno alla macchina" id="{17923d43-24f1-50c7-64a9-e4cd31565e8b}">
           <p14:sldIdLst>
             <p14:sldId id="259"/>
             <p14:sldId id="260"/>
           </p14:sldIdLst>
         </p14:section>
-        <p14:section name="Il programma completo" id="{b0fac0f4-3342-6cc7-6168-0193a6a47c50}">
+        <p14:section name="Il programma completo" id="{4bfb75a1-c88b-b884-6f86-ed2583bb6964}">
           <p14:sldIdLst>
             <p14:sldId id="261"/>
             <p14:sldId id="262"/>
@@ -150,7 +150,7 @@
             <p14:sldId id="266"/>
           </p14:sldIdLst>
         </p14:section>
-        <p14:section name="Eseguire e provare" id="{618f2e55-92dd-d865-741a-7d795e10a0b5}">
+        <p14:section name="Eseguire e provare" id="{1a4e2d0a-a3b0-ce74-1552-c654deb98970}">
           <p14:sldIdLst>
             <p14:sldId id="267"/>
             <p14:sldId id="268"/>
@@ -159,7 +159,7 @@
             <p14:sldId id="271"/>
           </p14:sldIdLst>
         </p14:section>
-        <p14:section name="Esercizi" id="{c08577d1-ba73-68f2-818e-47ba2016af56}">
+        <p14:section name="Esercizi" id="{1507db60-134b-ea31-6317-c38397cc87f5}">
           <p14:sldIdLst>
             <p14:sldId id="272"/>
           </p14:sldIdLst>
